--- a/manuscript/Design_Schematic_Editable.pptx
+++ b/manuscript/Design_Schematic_Editable.pptx
@@ -10,8 +10,8 @@
   <p:notesMasterIdLst>
     <p:notesMasterId r:id="rId3"/>
   </p:notesMasterIdLst>
-  <p:sldSz cx="10058400" cy="10424160"/>
-  <p:notesSz cx="10424160" cy="10058400"/>
+  <p:sldSz cx="8778240" cy="11887200"/>
+  <p:notesSz cx="11887200" cy="8778240"/>
   <p:defaultTextStyle>
     <a:lvl1pPr marL="0" algn="l" defTabSz="914400" rtl="0" eaLnBrk="1" latinLnBrk="0" hangingPunct="1">
       <a:defRPr sz="1800" kern="1200">
@@ -502,7 +502,7 @@
           <a:p>
             <a:r>
               <a:rPr lang="en-US" dirty="0"/>
-              <a:t>Editable version of Figure S1, the design schematic. Generated by manuscript/build_design_pptx.js from main_study/analysis_summary.json. Re-running that script overwrites this file, so save edits under a new name.</a:t>
+              <a:t>Editable version of Figure 1, the design schematic. Generated by manuscript/build_design_pptx.js from main_study/analysis_summary.json. Re-running that script overwrites this file, so save edits under a new name.</a:t>
             </a:r>
             <a:endParaRPr lang="en-US" dirty="0"/>
           </a:p>
@@ -876,14 +876,14 @@
         </p:nvSpPr>
         <p:spPr>
           <a:xfrm>
-            <a:off x="362102" y="333573"/>
-            <a:ext cx="0" cy="9684045"/>
+            <a:off x="351130" y="297180"/>
+            <a:ext cx="0" cy="11197742"/>
           </a:xfrm>
           <a:prstGeom prst="line">
             <a:avLst/>
           </a:prstGeom>
           <a:noFill/>
-          <a:ln w="20320">
+          <a:ln w="22860">
             <a:solidFill>
               <a:srgbClr val="D5DBE0"/>
             </a:solidFill>
@@ -899,8 +899,8 @@
         </p:nvSpPr>
         <p:spPr>
           <a:xfrm>
-            <a:off x="247802" y="219273"/>
-            <a:ext cx="228600" cy="228600"/>
+            <a:off x="227686" y="173736"/>
+            <a:ext cx="246888" cy="246888"/>
           </a:xfrm>
           <a:prstGeom prst="ellipse">
             <a:avLst/>
@@ -924,27 +924,27 @@
         </p:nvSpPr>
         <p:spPr>
           <a:xfrm>
-            <a:off x="60350" y="208483"/>
-            <a:ext cx="603504" cy="250180"/>
-          </a:xfrm>
-          <a:prstGeom prst="rect">
-            <a:avLst/>
-          </a:prstGeom>
-          <a:noFill/>
-          <a:ln/>
-        </p:spPr>
-        <p:txBody>
-          <a:bodyPr wrap="square" lIns="0" tIns="0" rIns="0" bIns="0" rtlCol="0" anchor="ctr"/>
-          <a:lstStyle/>
-          <a:p>
-            <a:pPr algn="ctr" indent="0" marL="0">
-              <a:lnSpc>
-                <a:spcPct val="115000"/>
-              </a:lnSpc>
-              <a:buNone/>
-            </a:pPr>
-            <a:r>
-              <a:rPr lang="en-US" sz="900" b="1" dirty="0">
+            <a:off x="87782" y="166421"/>
+            <a:ext cx="526694" cy="261518"/>
+          </a:xfrm>
+          <a:prstGeom prst="rect">
+            <a:avLst/>
+          </a:prstGeom>
+          <a:noFill/>
+          <a:ln/>
+        </p:spPr>
+        <p:txBody>
+          <a:bodyPr wrap="square" lIns="0" tIns="0" rIns="0" bIns="0" rtlCol="0" anchor="ctr"/>
+          <a:lstStyle/>
+          <a:p>
+            <a:pPr algn="ctr" indent="0" marL="0">
+              <a:lnSpc>
+                <a:spcPct val="120000"/>
+              </a:lnSpc>
+              <a:buNone/>
+            </a:pPr>
+            <a:r>
+              <a:rPr lang="en-US" sz="1100" b="1" dirty="0">
                 <a:solidFill>
                   <a:srgbClr val="FFFFFF"/>
                 </a:solidFill>
@@ -954,7 +954,7 @@
               </a:rPr>
               <a:t>1</a:t>
             </a:r>
-            <a:endParaRPr lang="en-US" sz="900" dirty="0"/>
+            <a:endParaRPr lang="en-US" sz="1100" dirty="0"/>
           </a:p>
         </p:txBody>
       </p:sp>
@@ -966,8 +966,8 @@
         </p:nvSpPr>
         <p:spPr>
           <a:xfrm>
-            <a:off x="724205" y="166787"/>
-            <a:ext cx="8046720" cy="333573"/>
+            <a:off x="702259" y="142646"/>
+            <a:ext cx="7198157" cy="309067"/>
           </a:xfrm>
           <a:prstGeom prst="rect">
             <a:avLst/>
@@ -981,7 +981,91 @@
           <a:p>
             <a:pPr algn="l" indent="0" marL="0">
               <a:lnSpc>
-                <a:spcPct val="115000"/>
+                <a:spcPct val="120000"/>
+              </a:lnSpc>
+              <a:buNone/>
+            </a:pPr>
+            <a:r>
+              <a:rPr lang="en-US" sz="1450" b="1" dirty="0">
+                <a:solidFill>
+                  <a:srgbClr val="1F2D3A"/>
+                </a:solidFill>
+                <a:latin typeface="Arial" pitchFamily="34" charset="0"/>
+                <a:ea typeface="Arial" pitchFamily="34" charset="-122"/>
+                <a:cs typeface="Arial" pitchFamily="34" charset="-120"/>
+              </a:rPr>
+              <a:t>Twelve analysis tasks on four ecological datasets</a:t>
+            </a:r>
+            <a:endParaRPr lang="en-US" sz="1450" dirty="0"/>
+          </a:p>
+        </p:txBody>
+      </p:sp>
+      <p:sp>
+        <p:nvSpPr>
+          <p:cNvPr id="6" name="Text 4"/>
+          <p:cNvSpPr/>
+          <p:nvPr/>
+        </p:nvSpPr>
+        <p:spPr>
+          <a:xfrm>
+            <a:off x="702259" y="475488"/>
+            <a:ext cx="7724851" cy="285293"/>
+          </a:xfrm>
+          <a:prstGeom prst="rect">
+            <a:avLst/>
+          </a:prstGeom>
+          <a:noFill/>
+          <a:ln/>
+        </p:spPr>
+        <p:txBody>
+          <a:bodyPr wrap="square" lIns="0" tIns="0" rIns="0" bIns="0" rtlCol="0" anchor="ctr"/>
+          <a:lstStyle/>
+          <a:p>
+            <a:pPr algn="l" indent="0" marL="0">
+              <a:lnSpc>
+                <a:spcPct val="120000"/>
+              </a:lnSpc>
+              <a:buNone/>
+            </a:pPr>
+            <a:r>
+              <a:rPr lang="en-US" sz="1100" dirty="0">
+                <a:solidFill>
+                  <a:srgbClr val="5B6570"/>
+                </a:solidFill>
+                <a:latin typeface="Arial" pitchFamily="34" charset="0"/>
+                <a:ea typeface="Arial" pitchFamily="34" charset="-122"/>
+                <a:cs typeface="Arial" pitchFamily="34" charset="-120"/>
+              </a:rPr>
+              <a:t>three tasks for each of four kinds of open choice, and no kind confined to one dataset</a:t>
+            </a:r>
+            <a:endParaRPr lang="en-US" sz="1100" dirty="0"/>
+          </a:p>
+        </p:txBody>
+      </p:sp>
+      <p:sp>
+        <p:nvSpPr>
+          <p:cNvPr id="7" name="Text 5"/>
+          <p:cNvSpPr/>
+          <p:nvPr/>
+        </p:nvSpPr>
+        <p:spPr>
+          <a:xfrm>
+            <a:off x="298460" y="1206551"/>
+            <a:ext cx="2106778" cy="261518"/>
+          </a:xfrm>
+          <a:prstGeom prst="rect">
+            <a:avLst/>
+          </a:prstGeom>
+          <a:noFill/>
+          <a:ln/>
+        </p:spPr>
+        <p:txBody>
+          <a:bodyPr wrap="square" lIns="0" tIns="0" rIns="0" bIns="0" rtlCol="0" anchor="ctr"/>
+          <a:lstStyle/>
+          <a:p>
+            <a:pPr algn="r" indent="0" marL="0">
+              <a:lnSpc>
+                <a:spcPct val="120000"/>
               </a:lnSpc>
               <a:buNone/>
             </a:pPr>
@@ -994,7 +1078,7 @@
                 <a:ea typeface="Arial" pitchFamily="34" charset="-122"/>
                 <a:cs typeface="Arial" pitchFamily="34" charset="-120"/>
               </a:rPr>
-              <a:t>Twelve analysis tasks on four ecological datasets</a:t>
+              <a:t>Sampling unit</a:t>
             </a:r>
             <a:endParaRPr lang="en-US" sz="1150" dirty="0"/>
           </a:p>
@@ -1002,33 +1086,33 @@
       </p:sp>
       <p:sp>
         <p:nvSpPr>
-          <p:cNvPr id="6" name="Text 4"/>
-          <p:cNvSpPr/>
-          <p:nvPr/>
-        </p:nvSpPr>
-        <p:spPr>
-          <a:xfrm>
-            <a:off x="724205" y="469087"/>
-            <a:ext cx="8549640" cy="271028"/>
-          </a:xfrm>
-          <a:prstGeom prst="rect">
-            <a:avLst/>
-          </a:prstGeom>
-          <a:noFill/>
-          <a:ln/>
-        </p:spPr>
-        <p:txBody>
-          <a:bodyPr wrap="square" lIns="0" tIns="0" rIns="0" bIns="0" rtlCol="0" anchor="ctr"/>
-          <a:lstStyle/>
-          <a:p>
-            <a:pPr algn="l" indent="0" marL="0">
-              <a:lnSpc>
-                <a:spcPct val="115000"/>
-              </a:lnSpc>
-              <a:buNone/>
-            </a:pPr>
-            <a:r>
-              <a:rPr lang="en-US" sz="860" dirty="0">
+          <p:cNvPr id="8" name="Text 6"/>
+          <p:cNvSpPr/>
+          <p:nvPr/>
+        </p:nvSpPr>
+        <p:spPr>
+          <a:xfrm>
+            <a:off x="298460" y="1479956"/>
+            <a:ext cx="2106778" cy="356616"/>
+          </a:xfrm>
+          <a:prstGeom prst="rect">
+            <a:avLst/>
+          </a:prstGeom>
+          <a:noFill/>
+          <a:ln/>
+        </p:spPr>
+        <p:txBody>
+          <a:bodyPr wrap="square" lIns="0" tIns="0" rIns="0" bIns="0" rtlCol="0" anchor="ctr"/>
+          <a:lstStyle/>
+          <a:p>
+            <a:pPr algn="r" indent="0" marL="0">
+              <a:lnSpc>
+                <a:spcPct val="120000"/>
+              </a:lnSpc>
+              <a:buNone/>
+            </a:pPr>
+            <a:r>
+              <a:rPr lang="en-US" sz="920" dirty="0">
                 <a:solidFill>
                   <a:srgbClr val="5B6570"/>
                 </a:solidFill>
@@ -1036,49 +1120,27 @@
                 <a:ea typeface="Arial" pitchFamily="34" charset="-122"/>
                 <a:cs typeface="Arial" pitchFamily="34" charset="-120"/>
               </a:rPr>
-              <a:t>three tasks for each of four kinds of open choice, and no kind confined to one dataset</a:t>
-            </a:r>
-            <a:endParaRPr lang="en-US" sz="860" dirty="0"/>
-          </a:p>
-        </p:txBody>
-      </p:sp>
-      <p:sp>
-        <p:nvSpPr>
-          <p:cNvPr id="7" name="Text 5"/>
-          <p:cNvSpPr/>
-          <p:nvPr/>
-        </p:nvSpPr>
-        <p:spPr>
-          <a:xfrm>
-            <a:off x="321869" y="951205"/>
-            <a:ext cx="2212848" cy="250180"/>
-          </a:xfrm>
-          <a:prstGeom prst="rect">
-            <a:avLst/>
-          </a:prstGeom>
-          <a:noFill/>
-          <a:ln/>
-        </p:spPr>
-        <p:txBody>
-          <a:bodyPr wrap="square" lIns="0" tIns="0" rIns="0" bIns="0" rtlCol="0" anchor="ctr"/>
-          <a:lstStyle/>
+              <a:t>what is averaged over</a:t>
+            </a:r>
+            <a:endParaRPr lang="en-US" sz="920" dirty="0"/>
+          </a:p>
           <a:p>
             <a:pPr algn="r" indent="0" marL="0">
               <a:lnSpc>
-                <a:spcPct val="115000"/>
-              </a:lnSpc>
-              <a:buNone/>
-            </a:pPr>
-            <a:r>
-              <a:rPr lang="en-US" sz="920" b="1" dirty="0">
-                <a:solidFill>
-                  <a:srgbClr val="1F2D3A"/>
-                </a:solidFill>
-                <a:latin typeface="Arial" pitchFamily="34" charset="0"/>
-                <a:ea typeface="Arial" pitchFamily="34" charset="-122"/>
-                <a:cs typeface="Arial" pitchFamily="34" charset="-120"/>
-              </a:rPr>
-              <a:t>Sampling unit</a:t>
+                <a:spcPct val="120000"/>
+              </a:lnSpc>
+              <a:buNone/>
+            </a:pPr>
+            <a:r>
+              <a:rPr lang="en-US" sz="920" dirty="0">
+                <a:solidFill>
+                  <a:srgbClr val="5B6570"/>
+                </a:solidFill>
+                <a:latin typeface="Arial" pitchFamily="34" charset="0"/>
+                <a:ea typeface="Arial" pitchFamily="34" charset="-122"/>
+                <a:cs typeface="Arial" pitchFamily="34" charset="-120"/>
+              </a:rPr>
+              <a:t>before a mean is taken</a:t>
             </a:r>
             <a:endParaRPr lang="en-US" sz="920" dirty="0"/>
           </a:p>
@@ -1086,80 +1148,18 @@
       </p:sp>
       <p:sp>
         <p:nvSpPr>
-          <p:cNvPr id="8" name="Text 6"/>
-          <p:cNvSpPr/>
-          <p:nvPr/>
-        </p:nvSpPr>
-        <p:spPr>
-          <a:xfrm>
-            <a:off x="321869" y="1201384"/>
-            <a:ext cx="2212848" cy="333573"/>
-          </a:xfrm>
-          <a:prstGeom prst="rect">
-            <a:avLst/>
-          </a:prstGeom>
-          <a:noFill/>
-          <a:ln/>
-        </p:spPr>
-        <p:txBody>
-          <a:bodyPr wrap="square" lIns="0" tIns="0" rIns="0" bIns="0" rtlCol="0" anchor="ctr"/>
-          <a:lstStyle/>
-          <a:p>
-            <a:pPr algn="r" indent="0" marL="0">
-              <a:lnSpc>
-                <a:spcPct val="115000"/>
-              </a:lnSpc>
-              <a:buNone/>
-            </a:pPr>
-            <a:r>
-              <a:rPr lang="en-US" sz="730" dirty="0">
-                <a:solidFill>
-                  <a:srgbClr val="5B6570"/>
-                </a:solidFill>
-                <a:latin typeface="Arial" pitchFamily="34" charset="0"/>
-                <a:ea typeface="Arial" pitchFamily="34" charset="-122"/>
-                <a:cs typeface="Arial" pitchFamily="34" charset="-120"/>
-              </a:rPr>
-              <a:t>what is averaged over</a:t>
-            </a:r>
-            <a:endParaRPr lang="en-US" sz="730" dirty="0"/>
-          </a:p>
-          <a:p>
-            <a:pPr algn="r" indent="0" marL="0">
-              <a:lnSpc>
-                <a:spcPct val="115000"/>
-              </a:lnSpc>
-              <a:buNone/>
-            </a:pPr>
-            <a:r>
-              <a:rPr lang="en-US" sz="730" dirty="0">
-                <a:solidFill>
-                  <a:srgbClr val="5B6570"/>
-                </a:solidFill>
-                <a:latin typeface="Arial" pitchFamily="34" charset="0"/>
-                <a:ea typeface="Arial" pitchFamily="34" charset="-122"/>
-                <a:cs typeface="Arial" pitchFamily="34" charset="-120"/>
-              </a:rPr>
-              <a:t>before a mean is taken</a:t>
-            </a:r>
-            <a:endParaRPr lang="en-US" sz="730" dirty="0"/>
-          </a:p>
-        </p:txBody>
-      </p:sp>
-      <p:sp>
-        <p:nvSpPr>
           <p:cNvPr id="9" name="Shape 7"/>
           <p:cNvSpPr/>
           <p:nvPr/>
         </p:nvSpPr>
         <p:spPr>
           <a:xfrm>
-            <a:off x="2715768" y="938174"/>
-            <a:ext cx="2095500" cy="495148"/>
+            <a:off x="2545690" y="1212494"/>
+            <a:ext cx="1808317" cy="523037"/>
           </a:xfrm>
           <a:prstGeom prst="roundRect">
             <a:avLst>
-              <a:gd name="adj" fmla="val 16620"/>
+              <a:gd name="adj" fmla="val 13986"/>
             </a:avLst>
           </a:prstGeom>
           <a:solidFill>
@@ -1167,7 +1167,7 @@
               <a:alpha val="15000"/>
             </a:srgbClr>
           </a:solidFill>
-          <a:ln w="13970">
+          <a:ln w="15240">
             <a:solidFill>
               <a:srgbClr val="8C6BB1"/>
             </a:solidFill>
@@ -1183,27 +1183,27 @@
         </p:nvSpPr>
         <p:spPr>
           <a:xfrm>
-            <a:off x="2745943" y="969447"/>
-            <a:ext cx="2035150" cy="333573"/>
-          </a:xfrm>
-          <a:prstGeom prst="rect">
-            <a:avLst/>
-          </a:prstGeom>
-          <a:noFill/>
-          <a:ln/>
-        </p:spPr>
-        <p:txBody>
-          <a:bodyPr wrap="square" lIns="0" tIns="0" rIns="0" bIns="0" rtlCol="0" anchor="ctr"/>
-          <a:lstStyle/>
-          <a:p>
-            <a:pPr algn="ctr" indent="0" marL="0">
-              <a:lnSpc>
-                <a:spcPct val="115000"/>
-              </a:lnSpc>
-              <a:buNone/>
-            </a:pPr>
-            <a:r>
-              <a:rPr lang="en-US" sz="770" dirty="0">
+            <a:off x="2572024" y="1206551"/>
+            <a:ext cx="1755648" cy="356616"/>
+          </a:xfrm>
+          <a:prstGeom prst="rect">
+            <a:avLst/>
+          </a:prstGeom>
+          <a:noFill/>
+          <a:ln/>
+        </p:spPr>
+        <p:txBody>
+          <a:bodyPr wrap="square" lIns="0" tIns="0" rIns="0" bIns="0" rtlCol="0" anchor="ctr"/>
+          <a:lstStyle/>
+          <a:p>
+            <a:pPr algn="ctr" indent="0" marL="0">
+              <a:lnSpc>
+                <a:spcPct val="120000"/>
+              </a:lnSpc>
+              <a:buNone/>
+            </a:pPr>
+            <a:r>
+              <a:rPr lang="en-US" sz="1000" dirty="0">
                 <a:solidFill>
                   <a:srgbClr val="1F2D3A"/>
                 </a:solidFill>
@@ -1211,9 +1211,29 @@
                 <a:ea typeface="Arial" pitchFamily="34" charset="-122"/>
                 <a:cs typeface="Arial" pitchFamily="34" charset="-120"/>
               </a:rPr>
-              <a:t>mean biomass per transect</a:t>
-            </a:r>
-            <a:endParaRPr lang="en-US" sz="770" dirty="0"/>
+              <a:t>mean biomass</a:t>
+            </a:r>
+            <a:endParaRPr lang="en-US" sz="1000" dirty="0"/>
+          </a:p>
+          <a:p>
+            <a:pPr algn="ctr" indent="0" marL="0">
+              <a:lnSpc>
+                <a:spcPct val="120000"/>
+              </a:lnSpc>
+              <a:buNone/>
+            </a:pPr>
+            <a:r>
+              <a:rPr lang="en-US" sz="1000" dirty="0">
+                <a:solidFill>
+                  <a:srgbClr val="1F2D3A"/>
+                </a:solidFill>
+                <a:latin typeface="Arial" pitchFamily="34" charset="0"/>
+                <a:ea typeface="Arial" pitchFamily="34" charset="-122"/>
+                <a:cs typeface="Arial" pitchFamily="34" charset="-120"/>
+              </a:rPr>
+              <a:t>per transect</a:t>
+            </a:r>
+            <a:endParaRPr lang="en-US" sz="1000" dirty="0"/>
           </a:p>
         </p:txBody>
       </p:sp>
@@ -1225,27 +1245,27 @@
         </p:nvSpPr>
         <p:spPr>
           <a:xfrm>
-            <a:off x="2745943" y="1250899"/>
-            <a:ext cx="2035150" cy="166787"/>
-          </a:xfrm>
-          <a:prstGeom prst="rect">
-            <a:avLst/>
-          </a:prstGeom>
-          <a:noFill/>
-          <a:ln/>
-        </p:spPr>
-        <p:txBody>
-          <a:bodyPr wrap="square" lIns="0" tIns="0" rIns="0" bIns="0" rtlCol="0" anchor="ctr"/>
-          <a:lstStyle/>
-          <a:p>
-            <a:pPr algn="ctr" indent="0" marL="0">
-              <a:lnSpc>
-                <a:spcPct val="115000"/>
-              </a:lnSpc>
-              <a:buNone/>
-            </a:pPr>
-            <a:r>
-              <a:rPr lang="en-US" sz="670" i="1" dirty="0">
+            <a:off x="2572024" y="1533449"/>
+            <a:ext cx="1755648" cy="178308"/>
+          </a:xfrm>
+          <a:prstGeom prst="rect">
+            <a:avLst/>
+          </a:prstGeom>
+          <a:noFill/>
+          <a:ln/>
+        </p:spPr>
+        <p:txBody>
+          <a:bodyPr wrap="square" lIns="0" tIns="0" rIns="0" bIns="0" rtlCol="0" anchor="ctr"/>
+          <a:lstStyle/>
+          <a:p>
+            <a:pPr algn="ctr" indent="0" marL="0">
+              <a:lnSpc>
+                <a:spcPct val="120000"/>
+              </a:lnSpc>
+              <a:buNone/>
+            </a:pPr>
+            <a:r>
+              <a:rPr lang="en-US" sz="850" i="1" dirty="0">
                 <a:solidFill>
                   <a:srgbClr val="5B6570"/>
                 </a:solidFill>
@@ -1255,7 +1275,7 @@
               </a:rPr>
               <a:t>reef fish</a:t>
             </a:r>
-            <a:endParaRPr lang="en-US" sz="670" dirty="0"/>
+            <a:endParaRPr lang="en-US" sz="850" dirty="0"/>
           </a:p>
         </p:txBody>
       </p:sp>
@@ -1267,12 +1287,12 @@
         </p:nvSpPr>
         <p:spPr>
           <a:xfrm>
-            <a:off x="4962144" y="938174"/>
-            <a:ext cx="2095500" cy="495148"/>
+            <a:off x="4476902" y="1212494"/>
+            <a:ext cx="1808317" cy="523037"/>
           </a:xfrm>
           <a:prstGeom prst="roundRect">
             <a:avLst>
-              <a:gd name="adj" fmla="val 16620"/>
+              <a:gd name="adj" fmla="val 13986"/>
             </a:avLst>
           </a:prstGeom>
           <a:solidFill>
@@ -1280,7 +1300,7 @@
               <a:alpha val="15000"/>
             </a:srgbClr>
           </a:solidFill>
-          <a:ln w="13970">
+          <a:ln w="15240">
             <a:solidFill>
               <a:srgbClr val="6A9E5B"/>
             </a:solidFill>
@@ -1296,27 +1316,27 @@
         </p:nvSpPr>
         <p:spPr>
           <a:xfrm>
-            <a:off x="4992319" y="969447"/>
-            <a:ext cx="2035150" cy="333573"/>
-          </a:xfrm>
-          <a:prstGeom prst="rect">
-            <a:avLst/>
-          </a:prstGeom>
-          <a:noFill/>
-          <a:ln/>
-        </p:spPr>
-        <p:txBody>
-          <a:bodyPr wrap="square" lIns="0" tIns="0" rIns="0" bIns="0" rtlCol="0" anchor="ctr"/>
-          <a:lstStyle/>
-          <a:p>
-            <a:pPr algn="ctr" indent="0" marL="0">
-              <a:lnSpc>
-                <a:spcPct val="115000"/>
-              </a:lnSpc>
-              <a:buNone/>
-            </a:pPr>
-            <a:r>
-              <a:rPr lang="en-US" sz="770" dirty="0">
+            <a:off x="4503237" y="1206551"/>
+            <a:ext cx="1755648" cy="356616"/>
+          </a:xfrm>
+          <a:prstGeom prst="rect">
+            <a:avLst/>
+          </a:prstGeom>
+          <a:noFill/>
+          <a:ln/>
+        </p:spPr>
+        <p:txBody>
+          <a:bodyPr wrap="square" lIns="0" tIns="0" rIns="0" bIns="0" rtlCol="0" anchor="ctr"/>
+          <a:lstStyle/>
+          <a:p>
+            <a:pPr algn="ctr" indent="0" marL="0">
+              <a:lnSpc>
+                <a:spcPct val="120000"/>
+              </a:lnSpc>
+              <a:buNone/>
+            </a:pPr>
+            <a:r>
+              <a:rPr lang="en-US" sz="1000" dirty="0">
                 <a:solidFill>
                   <a:srgbClr val="1F2D3A"/>
                 </a:solidFill>
@@ -1324,9 +1344,29 @@
                 <a:ea typeface="Arial" pitchFamily="34" charset="-122"/>
                 <a:cs typeface="Arial" pitchFamily="34" charset="-120"/>
               </a:rPr>
-              <a:t>mean catch per plot-year</a:t>
-            </a:r>
-            <a:endParaRPr lang="en-US" sz="770" dirty="0"/>
+              <a:t>mean catch</a:t>
+            </a:r>
+            <a:endParaRPr lang="en-US" sz="1000" dirty="0"/>
+          </a:p>
+          <a:p>
+            <a:pPr algn="ctr" indent="0" marL="0">
+              <a:lnSpc>
+                <a:spcPct val="120000"/>
+              </a:lnSpc>
+              <a:buNone/>
+            </a:pPr>
+            <a:r>
+              <a:rPr lang="en-US" sz="1000" dirty="0">
+                <a:solidFill>
+                  <a:srgbClr val="1F2D3A"/>
+                </a:solidFill>
+                <a:latin typeface="Arial" pitchFamily="34" charset="0"/>
+                <a:ea typeface="Arial" pitchFamily="34" charset="-122"/>
+                <a:cs typeface="Arial" pitchFamily="34" charset="-120"/>
+              </a:rPr>
+              <a:t>per plot-year</a:t>
+            </a:r>
+            <a:endParaRPr lang="en-US" sz="1000" dirty="0"/>
           </a:p>
         </p:txBody>
       </p:sp>
@@ -1338,27 +1378,27 @@
         </p:nvSpPr>
         <p:spPr>
           <a:xfrm>
-            <a:off x="4992319" y="1250899"/>
-            <a:ext cx="2035150" cy="166787"/>
-          </a:xfrm>
-          <a:prstGeom prst="rect">
-            <a:avLst/>
-          </a:prstGeom>
-          <a:noFill/>
-          <a:ln/>
-        </p:spPr>
-        <p:txBody>
-          <a:bodyPr wrap="square" lIns="0" tIns="0" rIns="0" bIns="0" rtlCol="0" anchor="ctr"/>
-          <a:lstStyle/>
-          <a:p>
-            <a:pPr algn="ctr" indent="0" marL="0">
-              <a:lnSpc>
-                <a:spcPct val="115000"/>
-              </a:lnSpc>
-              <a:buNone/>
-            </a:pPr>
-            <a:r>
-              <a:rPr lang="en-US" sz="670" i="1" dirty="0">
+            <a:off x="4503237" y="1533449"/>
+            <a:ext cx="1755648" cy="178308"/>
+          </a:xfrm>
+          <a:prstGeom prst="rect">
+            <a:avLst/>
+          </a:prstGeom>
+          <a:noFill/>
+          <a:ln/>
+        </p:spPr>
+        <p:txBody>
+          <a:bodyPr wrap="square" lIns="0" tIns="0" rIns="0" bIns="0" rtlCol="0" anchor="ctr"/>
+          <a:lstStyle/>
+          <a:p>
+            <a:pPr algn="ctr" indent="0" marL="0">
+              <a:lnSpc>
+                <a:spcPct val="120000"/>
+              </a:lnSpc>
+              <a:buNone/>
+            </a:pPr>
+            <a:r>
+              <a:rPr lang="en-US" sz="850" i="1" dirty="0">
                 <a:solidFill>
                   <a:srgbClr val="5B6570"/>
                 </a:solidFill>
@@ -1368,7 +1408,7 @@
               </a:rPr>
               <a:t>rodents</a:t>
             </a:r>
-            <a:endParaRPr lang="en-US" sz="670" dirty="0"/>
+            <a:endParaRPr lang="en-US" sz="850" dirty="0"/>
           </a:p>
         </p:txBody>
       </p:sp>
@@ -1380,12 +1420,12 @@
         </p:nvSpPr>
         <p:spPr>
           <a:xfrm>
-            <a:off x="7208520" y="938174"/>
-            <a:ext cx="2095500" cy="495148"/>
+            <a:off x="6408115" y="1212494"/>
+            <a:ext cx="1808317" cy="523037"/>
           </a:xfrm>
           <a:prstGeom prst="roundRect">
             <a:avLst>
-              <a:gd name="adj" fmla="val 16620"/>
+              <a:gd name="adj" fmla="val 13986"/>
             </a:avLst>
           </a:prstGeom>
           <a:solidFill>
@@ -1393,7 +1433,7 @@
               <a:alpha val="15000"/>
             </a:srgbClr>
           </a:solidFill>
-          <a:ln w="13970">
+          <a:ln w="15240">
             <a:solidFill>
               <a:srgbClr val="6A9E5B"/>
             </a:solidFill>
@@ -1409,27 +1449,27 @@
         </p:nvSpPr>
         <p:spPr>
           <a:xfrm>
-            <a:off x="7238695" y="969447"/>
-            <a:ext cx="2035150" cy="333573"/>
-          </a:xfrm>
-          <a:prstGeom prst="rect">
-            <a:avLst/>
-          </a:prstGeom>
-          <a:noFill/>
-          <a:ln/>
-        </p:spPr>
-        <p:txBody>
-          <a:bodyPr wrap="square" lIns="0" tIns="0" rIns="0" bIns="0" rtlCol="0" anchor="ctr"/>
-          <a:lstStyle/>
-          <a:p>
-            <a:pPr algn="ctr" indent="0" marL="0">
-              <a:lnSpc>
-                <a:spcPct val="115000"/>
-              </a:lnSpc>
-              <a:buNone/>
-            </a:pPr>
-            <a:r>
-              <a:rPr lang="en-US" sz="770" dirty="0">
+            <a:off x="6434450" y="1206551"/>
+            <a:ext cx="1755648" cy="356616"/>
+          </a:xfrm>
+          <a:prstGeom prst="rect">
+            <a:avLst/>
+          </a:prstGeom>
+          <a:noFill/>
+          <a:ln/>
+        </p:spPr>
+        <p:txBody>
+          <a:bodyPr wrap="square" lIns="0" tIns="0" rIns="0" bIns="0" rtlCol="0" anchor="ctr"/>
+          <a:lstStyle/>
+          <a:p>
+            <a:pPr algn="ctr" indent="0" marL="0">
+              <a:lnSpc>
+                <a:spcPct val="120000"/>
+              </a:lnSpc>
+              <a:buNone/>
+            </a:pPr>
+            <a:r>
+              <a:rPr lang="en-US" sz="1000" dirty="0">
                 <a:solidFill>
                   <a:srgbClr val="1F2D3A"/>
                 </a:solidFill>
@@ -1437,9 +1477,29 @@
                 <a:ea typeface="Arial" pitchFamily="34" charset="-122"/>
                 <a:cs typeface="Arial" pitchFamily="34" charset="-120"/>
               </a:rPr>
-              <a:t>mean richness per plot-year</a:t>
-            </a:r>
-            <a:endParaRPr lang="en-US" sz="770" dirty="0"/>
+              <a:t>mean richness</a:t>
+            </a:r>
+            <a:endParaRPr lang="en-US" sz="1000" dirty="0"/>
+          </a:p>
+          <a:p>
+            <a:pPr algn="ctr" indent="0" marL="0">
+              <a:lnSpc>
+                <a:spcPct val="120000"/>
+              </a:lnSpc>
+              <a:buNone/>
+            </a:pPr>
+            <a:r>
+              <a:rPr lang="en-US" sz="1000" dirty="0">
+                <a:solidFill>
+                  <a:srgbClr val="1F2D3A"/>
+                </a:solidFill>
+                <a:latin typeface="Arial" pitchFamily="34" charset="0"/>
+                <a:ea typeface="Arial" pitchFamily="34" charset="-122"/>
+                <a:cs typeface="Arial" pitchFamily="34" charset="-120"/>
+              </a:rPr>
+              <a:t>per plot-year</a:t>
+            </a:r>
+            <a:endParaRPr lang="en-US" sz="1000" dirty="0"/>
           </a:p>
         </p:txBody>
       </p:sp>
@@ -1451,27 +1511,27 @@
         </p:nvSpPr>
         <p:spPr>
           <a:xfrm>
-            <a:off x="7238695" y="1250899"/>
-            <a:ext cx="2035150" cy="166787"/>
-          </a:xfrm>
-          <a:prstGeom prst="rect">
-            <a:avLst/>
-          </a:prstGeom>
-          <a:noFill/>
-          <a:ln/>
-        </p:spPr>
-        <p:txBody>
-          <a:bodyPr wrap="square" lIns="0" tIns="0" rIns="0" bIns="0" rtlCol="0" anchor="ctr"/>
-          <a:lstStyle/>
-          <a:p>
-            <a:pPr algn="ctr" indent="0" marL="0">
-              <a:lnSpc>
-                <a:spcPct val="115000"/>
-              </a:lnSpc>
-              <a:buNone/>
-            </a:pPr>
-            <a:r>
-              <a:rPr lang="en-US" sz="670" i="1" dirty="0">
+            <a:off x="6434450" y="1533449"/>
+            <a:ext cx="1755648" cy="178308"/>
+          </a:xfrm>
+          <a:prstGeom prst="rect">
+            <a:avLst/>
+          </a:prstGeom>
+          <a:noFill/>
+          <a:ln/>
+        </p:spPr>
+        <p:txBody>
+          <a:bodyPr wrap="square" lIns="0" tIns="0" rIns="0" bIns="0" rtlCol="0" anchor="ctr"/>
+          <a:lstStyle/>
+          <a:p>
+            <a:pPr algn="ctr" indent="0" marL="0">
+              <a:lnSpc>
+                <a:spcPct val="120000"/>
+              </a:lnSpc>
+              <a:buNone/>
+            </a:pPr>
+            <a:r>
+              <a:rPr lang="en-US" sz="850" i="1" dirty="0">
                 <a:solidFill>
                   <a:srgbClr val="5B6570"/>
                 </a:solidFill>
@@ -1481,7 +1541,7 @@
               </a:rPr>
               <a:t>rodents</a:t>
             </a:r>
-            <a:endParaRPr lang="en-US" sz="670" dirty="0"/>
+            <a:endParaRPr lang="en-US" sz="850" dirty="0"/>
           </a:p>
         </p:txBody>
       </p:sp>
@@ -1493,8 +1553,8 @@
         </p:nvSpPr>
         <p:spPr>
           <a:xfrm>
-            <a:off x="321869" y="1561018"/>
-            <a:ext cx="2212848" cy="250180"/>
+            <a:off x="298460" y="1854403"/>
+            <a:ext cx="2106778" cy="261518"/>
           </a:xfrm>
           <a:prstGeom prst="rect">
             <a:avLst/>
@@ -1508,12 +1568,12 @@
           <a:p>
             <a:pPr algn="r" indent="0" marL="0">
               <a:lnSpc>
-                <a:spcPct val="115000"/>
-              </a:lnSpc>
-              <a:buNone/>
-            </a:pPr>
-            <a:r>
-              <a:rPr lang="en-US" sz="920" b="1" dirty="0">
+                <a:spcPct val="120000"/>
+              </a:lnSpc>
+              <a:buNone/>
+            </a:pPr>
+            <a:r>
+              <a:rPr lang="en-US" sz="1150" b="1" dirty="0">
                 <a:solidFill>
                   <a:srgbClr val="1F2D3A"/>
                 </a:solidFill>
@@ -1523,39 +1583,59 @@
               </a:rPr>
               <a:t>Scope</a:t>
             </a:r>
+            <a:endParaRPr lang="en-US" sz="1150" dirty="0"/>
+          </a:p>
+        </p:txBody>
+      </p:sp>
+      <p:sp>
+        <p:nvSpPr>
+          <p:cNvPr id="19" name="Text 17"/>
+          <p:cNvSpPr/>
+          <p:nvPr/>
+        </p:nvSpPr>
+        <p:spPr>
+          <a:xfrm>
+            <a:off x="298460" y="2127809"/>
+            <a:ext cx="2106778" cy="356616"/>
+          </a:xfrm>
+          <a:prstGeom prst="rect">
+            <a:avLst/>
+          </a:prstGeom>
+          <a:noFill/>
+          <a:ln/>
+        </p:spPr>
+        <p:txBody>
+          <a:bodyPr wrap="square" lIns="0" tIns="0" rIns="0" bIns="0" rtlCol="0" anchor="ctr"/>
+          <a:lstStyle/>
+          <a:p>
+            <a:pPr algn="r" indent="0" marL="0">
+              <a:lnSpc>
+                <a:spcPct val="120000"/>
+              </a:lnSpc>
+              <a:buNone/>
+            </a:pPr>
+            <a:r>
+              <a:rPr lang="en-US" sz="920" dirty="0">
+                <a:solidFill>
+                  <a:srgbClr val="5B6570"/>
+                </a:solidFill>
+                <a:latin typeface="Arial" pitchFamily="34" charset="0"/>
+                <a:ea typeface="Arial" pitchFamily="34" charset="-122"/>
+                <a:cs typeface="Arial" pitchFamily="34" charset="-120"/>
+              </a:rPr>
+              <a:t>pooled across groups,</a:t>
+            </a:r>
             <a:endParaRPr lang="en-US" sz="920" dirty="0"/>
           </a:p>
-        </p:txBody>
-      </p:sp>
-      <p:sp>
-        <p:nvSpPr>
-          <p:cNvPr id="19" name="Text 17"/>
-          <p:cNvSpPr/>
-          <p:nvPr/>
-        </p:nvSpPr>
-        <p:spPr>
-          <a:xfrm>
-            <a:off x="321869" y="1811198"/>
-            <a:ext cx="2212848" cy="333573"/>
-          </a:xfrm>
-          <a:prstGeom prst="rect">
-            <a:avLst/>
-          </a:prstGeom>
-          <a:noFill/>
-          <a:ln/>
-        </p:spPr>
-        <p:txBody>
-          <a:bodyPr wrap="square" lIns="0" tIns="0" rIns="0" bIns="0" rtlCol="0" anchor="ctr"/>
-          <a:lstStyle/>
           <a:p>
             <a:pPr algn="r" indent="0" marL="0">
               <a:lnSpc>
-                <a:spcPct val="115000"/>
-              </a:lnSpc>
-              <a:buNone/>
-            </a:pPr>
-            <a:r>
-              <a:rPr lang="en-US" sz="730" dirty="0">
+                <a:spcPct val="120000"/>
+              </a:lnSpc>
+              <a:buNone/>
+            </a:pPr>
+            <a:r>
+              <a:rPr lang="en-US" sz="920" dirty="0">
                 <a:solidFill>
                   <a:srgbClr val="5B6570"/>
                 </a:solidFill>
@@ -1563,29 +1643,9 @@
                 <a:ea typeface="Arial" pitchFamily="34" charset="-122"/>
                 <a:cs typeface="Arial" pitchFamily="34" charset="-120"/>
               </a:rPr>
-              <a:t>pooled across groups,</a:t>
-            </a:r>
-            <a:endParaRPr lang="en-US" sz="730" dirty="0"/>
-          </a:p>
-          <a:p>
-            <a:pPr algn="r" indent="0" marL="0">
-              <a:lnSpc>
-                <a:spcPct val="115000"/>
-              </a:lnSpc>
-              <a:buNone/>
-            </a:pPr>
-            <a:r>
-              <a:rPr lang="en-US" sz="730" dirty="0">
-                <a:solidFill>
-                  <a:srgbClr val="5B6570"/>
-                </a:solidFill>
-                <a:latin typeface="Arial" pitchFamily="34" charset="0"/>
-                <a:ea typeface="Arial" pitchFamily="34" charset="-122"/>
-                <a:cs typeface="Arial" pitchFamily="34" charset="-120"/>
-              </a:rPr>
               <a:t>or computed within them</a:t>
             </a:r>
-            <a:endParaRPr lang="en-US" sz="730" dirty="0"/>
+            <a:endParaRPr lang="en-US" sz="920" dirty="0"/>
           </a:p>
         </p:txBody>
       </p:sp>
@@ -1597,12 +1657,12 @@
         </p:nvSpPr>
         <p:spPr>
           <a:xfrm>
-            <a:off x="2715768" y="1547988"/>
-            <a:ext cx="2095500" cy="495148"/>
+            <a:off x="2545690" y="1860347"/>
+            <a:ext cx="1808317" cy="523037"/>
           </a:xfrm>
           <a:prstGeom prst="roundRect">
             <a:avLst>
-              <a:gd name="adj" fmla="val 16620"/>
+              <a:gd name="adj" fmla="val 13986"/>
             </a:avLst>
           </a:prstGeom>
           <a:solidFill>
@@ -1610,7 +1670,7 @@
               <a:alpha val="15000"/>
             </a:srgbClr>
           </a:solidFill>
-          <a:ln w="13970">
+          <a:ln w="15240">
             <a:solidFill>
               <a:srgbClr val="E69F00"/>
             </a:solidFill>
@@ -1626,27 +1686,27 @@
         </p:nvSpPr>
         <p:spPr>
           <a:xfrm>
-            <a:off x="2745943" y="1579260"/>
-            <a:ext cx="2035150" cy="333573"/>
-          </a:xfrm>
-          <a:prstGeom prst="rect">
-            <a:avLst/>
-          </a:prstGeom>
-          <a:noFill/>
-          <a:ln/>
-        </p:spPr>
-        <p:txBody>
-          <a:bodyPr wrap="square" lIns="0" tIns="0" rIns="0" bIns="0" rtlCol="0" anchor="ctr"/>
-          <a:lstStyle/>
-          <a:p>
-            <a:pPr algn="ctr" indent="0" marL="0">
-              <a:lnSpc>
-                <a:spcPct val="115000"/>
-              </a:lnSpc>
-              <a:buNone/>
-            </a:pPr>
-            <a:r>
-              <a:rPr lang="en-US" sz="770" dirty="0">
+            <a:off x="2572024" y="1854403"/>
+            <a:ext cx="1755648" cy="356616"/>
+          </a:xfrm>
+          <a:prstGeom prst="rect">
+            <a:avLst/>
+          </a:prstGeom>
+          <a:noFill/>
+          <a:ln/>
+        </p:spPr>
+        <p:txBody>
+          <a:bodyPr wrap="square" lIns="0" tIns="0" rIns="0" bIns="0" rtlCol="0" anchor="ctr"/>
+          <a:lstStyle/>
+          <a:p>
+            <a:pPr algn="ctr" indent="0" marL="0">
+              <a:lnSpc>
+                <a:spcPct val="120000"/>
+              </a:lnSpc>
+              <a:buNone/>
+            </a:pPr>
+            <a:r>
+              <a:rPr lang="en-US" sz="1000" dirty="0">
                 <a:solidFill>
                   <a:srgbClr val="1F2D3A"/>
                 </a:solidFill>
@@ -1654,9 +1714,29 @@
                 <a:ea typeface="Arial" pitchFamily="34" charset="-122"/>
                 <a:cs typeface="Arial" pitchFamily="34" charset="-120"/>
               </a:rPr>
-              <a:t>sepal length vs width</a:t>
-            </a:r>
-            <a:endParaRPr lang="en-US" sz="770" dirty="0"/>
+              <a:t>sepal length</a:t>
+            </a:r>
+            <a:endParaRPr lang="en-US" sz="1000" dirty="0"/>
+          </a:p>
+          <a:p>
+            <a:pPr algn="ctr" indent="0" marL="0">
+              <a:lnSpc>
+                <a:spcPct val="120000"/>
+              </a:lnSpc>
+              <a:buNone/>
+            </a:pPr>
+            <a:r>
+              <a:rPr lang="en-US" sz="1000" dirty="0">
+                <a:solidFill>
+                  <a:srgbClr val="1F2D3A"/>
+                </a:solidFill>
+                <a:latin typeface="Arial" pitchFamily="34" charset="0"/>
+                <a:ea typeface="Arial" pitchFamily="34" charset="-122"/>
+                <a:cs typeface="Arial" pitchFamily="34" charset="-120"/>
+              </a:rPr>
+              <a:t>vs width</a:t>
+            </a:r>
+            <a:endParaRPr lang="en-US" sz="1000" dirty="0"/>
           </a:p>
         </p:txBody>
       </p:sp>
@@ -1668,27 +1748,27 @@
         </p:nvSpPr>
         <p:spPr>
           <a:xfrm>
-            <a:off x="2745943" y="1860713"/>
-            <a:ext cx="2035150" cy="166787"/>
-          </a:xfrm>
-          <a:prstGeom prst="rect">
-            <a:avLst/>
-          </a:prstGeom>
-          <a:noFill/>
-          <a:ln/>
-        </p:spPr>
-        <p:txBody>
-          <a:bodyPr wrap="square" lIns="0" tIns="0" rIns="0" bIns="0" rtlCol="0" anchor="ctr"/>
-          <a:lstStyle/>
-          <a:p>
-            <a:pPr algn="ctr" indent="0" marL="0">
-              <a:lnSpc>
-                <a:spcPct val="115000"/>
-              </a:lnSpc>
-              <a:buNone/>
-            </a:pPr>
-            <a:r>
-              <a:rPr lang="en-US" sz="670" i="1" dirty="0">
+            <a:off x="2572024" y="2181301"/>
+            <a:ext cx="1755648" cy="178308"/>
+          </a:xfrm>
+          <a:prstGeom prst="rect">
+            <a:avLst/>
+          </a:prstGeom>
+          <a:noFill/>
+          <a:ln/>
+        </p:spPr>
+        <p:txBody>
+          <a:bodyPr wrap="square" lIns="0" tIns="0" rIns="0" bIns="0" rtlCol="0" anchor="ctr"/>
+          <a:lstStyle/>
+          <a:p>
+            <a:pPr algn="ctr" indent="0" marL="0">
+              <a:lnSpc>
+                <a:spcPct val="120000"/>
+              </a:lnSpc>
+              <a:buNone/>
+            </a:pPr>
+            <a:r>
+              <a:rPr lang="en-US" sz="850" i="1" dirty="0">
                 <a:solidFill>
                   <a:srgbClr val="5B6570"/>
                 </a:solidFill>
@@ -1698,7 +1778,7 @@
               </a:rPr>
               <a:t>iris</a:t>
             </a:r>
-            <a:endParaRPr lang="en-US" sz="670" dirty="0"/>
+            <a:endParaRPr lang="en-US" sz="850" dirty="0"/>
           </a:p>
         </p:txBody>
       </p:sp>
@@ -1710,12 +1790,12 @@
         </p:nvSpPr>
         <p:spPr>
           <a:xfrm>
-            <a:off x="4962144" y="1547988"/>
-            <a:ext cx="2095500" cy="495148"/>
+            <a:off x="4476902" y="1860347"/>
+            <a:ext cx="1808317" cy="523037"/>
           </a:xfrm>
           <a:prstGeom prst="roundRect">
             <a:avLst>
-              <a:gd name="adj" fmla="val 16620"/>
+              <a:gd name="adj" fmla="val 13986"/>
             </a:avLst>
           </a:prstGeom>
           <a:solidFill>
@@ -1723,7 +1803,7 @@
               <a:alpha val="15000"/>
             </a:srgbClr>
           </a:solidFill>
-          <a:ln w="13970">
+          <a:ln w="15240">
             <a:solidFill>
               <a:srgbClr val="56B4E9"/>
             </a:solidFill>
@@ -1739,27 +1819,27 @@
         </p:nvSpPr>
         <p:spPr>
           <a:xfrm>
-            <a:off x="4992319" y="1579260"/>
-            <a:ext cx="2035150" cy="333573"/>
-          </a:xfrm>
-          <a:prstGeom prst="rect">
-            <a:avLst/>
-          </a:prstGeom>
-          <a:noFill/>
-          <a:ln/>
-        </p:spPr>
-        <p:txBody>
-          <a:bodyPr wrap="square" lIns="0" tIns="0" rIns="0" bIns="0" rtlCol="0" anchor="ctr"/>
-          <a:lstStyle/>
-          <a:p>
-            <a:pPr algn="ctr" indent="0" marL="0">
-              <a:lnSpc>
-                <a:spcPct val="115000"/>
-              </a:lnSpc>
-              <a:buNone/>
-            </a:pPr>
-            <a:r>
-              <a:rPr lang="en-US" sz="770" dirty="0">
+            <a:off x="4503237" y="1854403"/>
+            <a:ext cx="1755648" cy="356616"/>
+          </a:xfrm>
+          <a:prstGeom prst="rect">
+            <a:avLst/>
+          </a:prstGeom>
+          <a:noFill/>
+          <a:ln/>
+        </p:spPr>
+        <p:txBody>
+          <a:bodyPr wrap="square" lIns="0" tIns="0" rIns="0" bIns="0" rtlCol="0" anchor="ctr"/>
+          <a:lstStyle/>
+          <a:p>
+            <a:pPr algn="ctr" indent="0" marL="0">
+              <a:lnSpc>
+                <a:spcPct val="120000"/>
+              </a:lnSpc>
+              <a:buNone/>
+            </a:pPr>
+            <a:r>
+              <a:rPr lang="en-US" sz="1000" dirty="0">
                 <a:solidFill>
                   <a:srgbClr val="1F2D3A"/>
                 </a:solidFill>
@@ -1767,9 +1847,29 @@
                 <a:ea typeface="Arial" pitchFamily="34" charset="-122"/>
                 <a:cs typeface="Arial" pitchFamily="34" charset="-120"/>
               </a:rPr>
-              <a:t>bill length vs depth</a:t>
-            </a:r>
-            <a:endParaRPr lang="en-US" sz="770" dirty="0"/>
+              <a:t>bill length</a:t>
+            </a:r>
+            <a:endParaRPr lang="en-US" sz="1000" dirty="0"/>
+          </a:p>
+          <a:p>
+            <a:pPr algn="ctr" indent="0" marL="0">
+              <a:lnSpc>
+                <a:spcPct val="120000"/>
+              </a:lnSpc>
+              <a:buNone/>
+            </a:pPr>
+            <a:r>
+              <a:rPr lang="en-US" sz="1000" dirty="0">
+                <a:solidFill>
+                  <a:srgbClr val="1F2D3A"/>
+                </a:solidFill>
+                <a:latin typeface="Arial" pitchFamily="34" charset="0"/>
+                <a:ea typeface="Arial" pitchFamily="34" charset="-122"/>
+                <a:cs typeface="Arial" pitchFamily="34" charset="-120"/>
+              </a:rPr>
+              <a:t>vs depth</a:t>
+            </a:r>
+            <a:endParaRPr lang="en-US" sz="1000" dirty="0"/>
           </a:p>
         </p:txBody>
       </p:sp>
@@ -1781,27 +1881,27 @@
         </p:nvSpPr>
         <p:spPr>
           <a:xfrm>
-            <a:off x="4992319" y="1860713"/>
-            <a:ext cx="2035150" cy="166787"/>
-          </a:xfrm>
-          <a:prstGeom prst="rect">
-            <a:avLst/>
-          </a:prstGeom>
-          <a:noFill/>
-          <a:ln/>
-        </p:spPr>
-        <p:txBody>
-          <a:bodyPr wrap="square" lIns="0" tIns="0" rIns="0" bIns="0" rtlCol="0" anchor="ctr"/>
-          <a:lstStyle/>
-          <a:p>
-            <a:pPr algn="ctr" indent="0" marL="0">
-              <a:lnSpc>
-                <a:spcPct val="115000"/>
-              </a:lnSpc>
-              <a:buNone/>
-            </a:pPr>
-            <a:r>
-              <a:rPr lang="en-US" sz="670" i="1" dirty="0">
+            <a:off x="4503237" y="2181301"/>
+            <a:ext cx="1755648" cy="178308"/>
+          </a:xfrm>
+          <a:prstGeom prst="rect">
+            <a:avLst/>
+          </a:prstGeom>
+          <a:noFill/>
+          <a:ln/>
+        </p:spPr>
+        <p:txBody>
+          <a:bodyPr wrap="square" lIns="0" tIns="0" rIns="0" bIns="0" rtlCol="0" anchor="ctr"/>
+          <a:lstStyle/>
+          <a:p>
+            <a:pPr algn="ctr" indent="0" marL="0">
+              <a:lnSpc>
+                <a:spcPct val="120000"/>
+              </a:lnSpc>
+              <a:buNone/>
+            </a:pPr>
+            <a:r>
+              <a:rPr lang="en-US" sz="850" i="1" dirty="0">
                 <a:solidFill>
                   <a:srgbClr val="5B6570"/>
                 </a:solidFill>
@@ -1811,7 +1911,7 @@
               </a:rPr>
               <a:t>penguins</a:t>
             </a:r>
-            <a:endParaRPr lang="en-US" sz="670" dirty="0"/>
+            <a:endParaRPr lang="en-US" sz="850" dirty="0"/>
           </a:p>
         </p:txBody>
       </p:sp>
@@ -1823,12 +1923,12 @@
         </p:nvSpPr>
         <p:spPr>
           <a:xfrm>
-            <a:off x="7208520" y="1547988"/>
-            <a:ext cx="2095500" cy="495148"/>
+            <a:off x="6408115" y="1860347"/>
+            <a:ext cx="1808317" cy="523037"/>
           </a:xfrm>
           <a:prstGeom prst="roundRect">
             <a:avLst>
-              <a:gd name="adj" fmla="val 16620"/>
+              <a:gd name="adj" fmla="val 13986"/>
             </a:avLst>
           </a:prstGeom>
           <a:solidFill>
@@ -1836,7 +1936,7 @@
               <a:alpha val="15000"/>
             </a:srgbClr>
           </a:solidFill>
-          <a:ln w="13970">
+          <a:ln w="15240">
             <a:solidFill>
               <a:srgbClr val="6A9E5B"/>
             </a:solidFill>
@@ -1852,27 +1952,27 @@
         </p:nvSpPr>
         <p:spPr>
           <a:xfrm>
-            <a:off x="7238695" y="1579260"/>
-            <a:ext cx="2035150" cy="333573"/>
-          </a:xfrm>
-          <a:prstGeom prst="rect">
-            <a:avLst/>
-          </a:prstGeom>
-          <a:noFill/>
-          <a:ln/>
-        </p:spPr>
-        <p:txBody>
-          <a:bodyPr wrap="square" lIns="0" tIns="0" rIns="0" bIns="0" rtlCol="0" anchor="ctr"/>
-          <a:lstStyle/>
-          <a:p>
-            <a:pPr algn="ctr" indent="0" marL="0">
-              <a:lnSpc>
-                <a:spcPct val="115000"/>
-              </a:lnSpc>
-              <a:buNone/>
-            </a:pPr>
-            <a:r>
-              <a:rPr lang="en-US" sz="770" dirty="0">
+            <a:off x="6434450" y="1854403"/>
+            <a:ext cx="1755648" cy="356616"/>
+          </a:xfrm>
+          <a:prstGeom prst="rect">
+            <a:avLst/>
+          </a:prstGeom>
+          <a:noFill/>
+          <a:ln/>
+        </p:spPr>
+        <p:txBody>
+          <a:bodyPr wrap="square" lIns="0" tIns="0" rIns="0" bIns="0" rtlCol="0" anchor="ctr"/>
+          <a:lstStyle/>
+          <a:p>
+            <a:pPr algn="ctr" indent="0" marL="0">
+              <a:lnSpc>
+                <a:spcPct val="120000"/>
+              </a:lnSpc>
+              <a:buNone/>
+            </a:pPr>
+            <a:r>
+              <a:rPr lang="en-US" sz="1000" dirty="0">
                 <a:solidFill>
                   <a:srgbClr val="1F2D3A"/>
                 </a:solidFill>
@@ -1880,9 +1980,29 @@
                 <a:ea typeface="Arial" pitchFamily="34" charset="-122"/>
                 <a:cs typeface="Arial" pitchFamily="34" charset="-120"/>
               </a:rPr>
-              <a:t>hindfoot vs weight</a:t>
-            </a:r>
-            <a:endParaRPr lang="en-US" sz="770" dirty="0"/>
+              <a:t>hindfoot</a:t>
+            </a:r>
+            <a:endParaRPr lang="en-US" sz="1000" dirty="0"/>
+          </a:p>
+          <a:p>
+            <a:pPr algn="ctr" indent="0" marL="0">
+              <a:lnSpc>
+                <a:spcPct val="120000"/>
+              </a:lnSpc>
+              <a:buNone/>
+            </a:pPr>
+            <a:r>
+              <a:rPr lang="en-US" sz="1000" dirty="0">
+                <a:solidFill>
+                  <a:srgbClr val="1F2D3A"/>
+                </a:solidFill>
+                <a:latin typeface="Arial" pitchFamily="34" charset="0"/>
+                <a:ea typeface="Arial" pitchFamily="34" charset="-122"/>
+                <a:cs typeface="Arial" pitchFamily="34" charset="-120"/>
+              </a:rPr>
+              <a:t>vs weight</a:t>
+            </a:r>
+            <a:endParaRPr lang="en-US" sz="1000" dirty="0"/>
           </a:p>
         </p:txBody>
       </p:sp>
@@ -1894,27 +2014,27 @@
         </p:nvSpPr>
         <p:spPr>
           <a:xfrm>
-            <a:off x="7238695" y="1860713"/>
-            <a:ext cx="2035150" cy="166787"/>
-          </a:xfrm>
-          <a:prstGeom prst="rect">
-            <a:avLst/>
-          </a:prstGeom>
-          <a:noFill/>
-          <a:ln/>
-        </p:spPr>
-        <p:txBody>
-          <a:bodyPr wrap="square" lIns="0" tIns="0" rIns="0" bIns="0" rtlCol="0" anchor="ctr"/>
-          <a:lstStyle/>
-          <a:p>
-            <a:pPr algn="ctr" indent="0" marL="0">
-              <a:lnSpc>
-                <a:spcPct val="115000"/>
-              </a:lnSpc>
-              <a:buNone/>
-            </a:pPr>
-            <a:r>
-              <a:rPr lang="en-US" sz="670" i="1" dirty="0">
+            <a:off x="6434450" y="2181301"/>
+            <a:ext cx="1755648" cy="178308"/>
+          </a:xfrm>
+          <a:prstGeom prst="rect">
+            <a:avLst/>
+          </a:prstGeom>
+          <a:noFill/>
+          <a:ln/>
+        </p:spPr>
+        <p:txBody>
+          <a:bodyPr wrap="square" lIns="0" tIns="0" rIns="0" bIns="0" rtlCol="0" anchor="ctr"/>
+          <a:lstStyle/>
+          <a:p>
+            <a:pPr algn="ctr" indent="0" marL="0">
+              <a:lnSpc>
+                <a:spcPct val="120000"/>
+              </a:lnSpc>
+              <a:buNone/>
+            </a:pPr>
+            <a:r>
+              <a:rPr lang="en-US" sz="850" i="1" dirty="0">
                 <a:solidFill>
                   <a:srgbClr val="5B6570"/>
                 </a:solidFill>
@@ -1924,7 +2044,7 @@
               </a:rPr>
               <a:t>rodents</a:t>
             </a:r>
-            <a:endParaRPr lang="en-US" sz="670" dirty="0"/>
+            <a:endParaRPr lang="en-US" sz="850" dirty="0"/>
           </a:p>
         </p:txBody>
       </p:sp>
@@ -1936,8 +2056,8 @@
         </p:nvSpPr>
         <p:spPr>
           <a:xfrm>
-            <a:off x="321869" y="2170831"/>
-            <a:ext cx="2212848" cy="250180"/>
+            <a:off x="298460" y="2502256"/>
+            <a:ext cx="2106778" cy="261518"/>
           </a:xfrm>
           <a:prstGeom prst="rect">
             <a:avLst/>
@@ -1951,12 +2071,12 @@
           <a:p>
             <a:pPr algn="r" indent="0" marL="0">
               <a:lnSpc>
-                <a:spcPct val="115000"/>
-              </a:lnSpc>
-              <a:buNone/>
-            </a:pPr>
-            <a:r>
-              <a:rPr lang="en-US" sz="920" b="1" dirty="0">
+                <a:spcPct val="120000"/>
+              </a:lnSpc>
+              <a:buNone/>
+            </a:pPr>
+            <a:r>
+              <a:rPr lang="en-US" sz="1150" b="1" dirty="0">
                 <a:solidFill>
                   <a:srgbClr val="1F2D3A"/>
                 </a:solidFill>
@@ -1966,39 +2086,59 @@
               </a:rPr>
               <a:t>Missing records</a:t>
             </a:r>
+            <a:endParaRPr lang="en-US" sz="1150" dirty="0"/>
+          </a:p>
+        </p:txBody>
+      </p:sp>
+      <p:sp>
+        <p:nvSpPr>
+          <p:cNvPr id="30" name="Text 28"/>
+          <p:cNvSpPr/>
+          <p:nvPr/>
+        </p:nvSpPr>
+        <p:spPr>
+          <a:xfrm>
+            <a:off x="298460" y="2775661"/>
+            <a:ext cx="2106778" cy="356616"/>
+          </a:xfrm>
+          <a:prstGeom prst="rect">
+            <a:avLst/>
+          </a:prstGeom>
+          <a:noFill/>
+          <a:ln/>
+        </p:spPr>
+        <p:txBody>
+          <a:bodyPr wrap="square" lIns="0" tIns="0" rIns="0" bIns="0" rtlCol="0" anchor="ctr"/>
+          <a:lstStyle/>
+          <a:p>
+            <a:pPr algn="r" indent="0" marL="0">
+              <a:lnSpc>
+                <a:spcPct val="120000"/>
+              </a:lnSpc>
+              <a:buNone/>
+            </a:pPr>
+            <a:r>
+              <a:rPr lang="en-US" sz="920" dirty="0">
+                <a:solidFill>
+                  <a:srgbClr val="5B6570"/>
+                </a:solidFill>
+                <a:latin typeface="Arial" pitchFamily="34" charset="0"/>
+                <a:ea typeface="Arial" pitchFamily="34" charset="-122"/>
+                <a:cs typeface="Arial" pitchFamily="34" charset="-120"/>
+              </a:rPr>
+              <a:t>absent values, and rows</a:t>
+            </a:r>
             <a:endParaRPr lang="en-US" sz="920" dirty="0"/>
           </a:p>
-        </p:txBody>
-      </p:sp>
-      <p:sp>
-        <p:nvSpPr>
-          <p:cNvPr id="30" name="Text 28"/>
-          <p:cNvSpPr/>
-          <p:nvPr/>
-        </p:nvSpPr>
-        <p:spPr>
-          <a:xfrm>
-            <a:off x="321869" y="2421011"/>
-            <a:ext cx="2212848" cy="333573"/>
-          </a:xfrm>
-          <a:prstGeom prst="rect">
-            <a:avLst/>
-          </a:prstGeom>
-          <a:noFill/>
-          <a:ln/>
-        </p:spPr>
-        <p:txBody>
-          <a:bodyPr wrap="square" lIns="0" tIns="0" rIns="0" bIns="0" rtlCol="0" anchor="ctr"/>
-          <a:lstStyle/>
           <a:p>
             <a:pPr algn="r" indent="0" marL="0">
               <a:lnSpc>
-                <a:spcPct val="115000"/>
-              </a:lnSpc>
-              <a:buNone/>
-            </a:pPr>
-            <a:r>
-              <a:rPr lang="en-US" sz="730" dirty="0">
+                <a:spcPct val="120000"/>
+              </a:lnSpc>
+              <a:buNone/>
+            </a:pPr>
+            <a:r>
+              <a:rPr lang="en-US" sz="920" dirty="0">
                 <a:solidFill>
                   <a:srgbClr val="5B6570"/>
                 </a:solidFill>
@@ -2006,29 +2146,9 @@
                 <a:ea typeface="Arial" pitchFamily="34" charset="-122"/>
                 <a:cs typeface="Arial" pitchFamily="34" charset="-120"/>
               </a:rPr>
-              <a:t>absent values, and rows</a:t>
-            </a:r>
-            <a:endParaRPr lang="en-US" sz="730" dirty="0"/>
-          </a:p>
-          <a:p>
-            <a:pPr algn="r" indent="0" marL="0">
-              <a:lnSpc>
-                <a:spcPct val="115000"/>
-              </a:lnSpc>
-              <a:buNone/>
-            </a:pPr>
-            <a:r>
-              <a:rPr lang="en-US" sz="730" dirty="0">
-                <a:solidFill>
-                  <a:srgbClr val="5B6570"/>
-                </a:solidFill>
-                <a:latin typeface="Arial" pitchFamily="34" charset="0"/>
-                <a:ea typeface="Arial" pitchFamily="34" charset="-122"/>
-                <a:cs typeface="Arial" pitchFamily="34" charset="-120"/>
-              </a:rPr>
               <a:t>absent altogether</a:t>
             </a:r>
-            <a:endParaRPr lang="en-US" sz="730" dirty="0"/>
+            <a:endParaRPr lang="en-US" sz="920" dirty="0"/>
           </a:p>
         </p:txBody>
       </p:sp>
@@ -2040,12 +2160,12 @@
         </p:nvSpPr>
         <p:spPr>
           <a:xfrm>
-            <a:off x="2715768" y="2157801"/>
-            <a:ext cx="2095500" cy="495148"/>
+            <a:off x="2545690" y="2508199"/>
+            <a:ext cx="1808317" cy="523037"/>
           </a:xfrm>
           <a:prstGeom prst="roundRect">
             <a:avLst>
-              <a:gd name="adj" fmla="val 16620"/>
+              <a:gd name="adj" fmla="val 13986"/>
             </a:avLst>
           </a:prstGeom>
           <a:solidFill>
@@ -2053,7 +2173,7 @@
               <a:alpha val="15000"/>
             </a:srgbClr>
           </a:solidFill>
-          <a:ln w="13970">
+          <a:ln w="15240">
             <a:solidFill>
               <a:srgbClr val="56B4E9"/>
             </a:solidFill>
@@ -2069,27 +2189,27 @@
         </p:nvSpPr>
         <p:spPr>
           <a:xfrm>
-            <a:off x="2745943" y="2189074"/>
-            <a:ext cx="2035150" cy="333573"/>
-          </a:xfrm>
-          <a:prstGeom prst="rect">
-            <a:avLst/>
-          </a:prstGeom>
-          <a:noFill/>
-          <a:ln/>
-        </p:spPr>
-        <p:txBody>
-          <a:bodyPr wrap="square" lIns="0" tIns="0" rIns="0" bIns="0" rtlCol="0" anchor="ctr"/>
-          <a:lstStyle/>
-          <a:p>
-            <a:pPr algn="ctr" indent="0" marL="0">
-              <a:lnSpc>
-                <a:spcPct val="115000"/>
-              </a:lnSpc>
-              <a:buNone/>
-            </a:pPr>
-            <a:r>
-              <a:rPr lang="en-US" sz="770" dirty="0">
+            <a:off x="2572024" y="2502256"/>
+            <a:ext cx="1755648" cy="356616"/>
+          </a:xfrm>
+          <a:prstGeom prst="rect">
+            <a:avLst/>
+          </a:prstGeom>
+          <a:noFill/>
+          <a:ln/>
+        </p:spPr>
+        <p:txBody>
+          <a:bodyPr wrap="square" lIns="0" tIns="0" rIns="0" bIns="0" rtlCol="0" anchor="ctr"/>
+          <a:lstStyle/>
+          <a:p>
+            <a:pPr algn="ctr" indent="0" marL="0">
+              <a:lnSpc>
+                <a:spcPct val="120000"/>
+              </a:lnSpc>
+              <a:buNone/>
+            </a:pPr>
+            <a:r>
+              <a:rPr lang="en-US" sz="1000" dirty="0">
                 <a:solidFill>
                   <a:srgbClr val="1F2D3A"/>
                 </a:solidFill>
@@ -2097,9 +2217,29 @@
                 <a:ea typeface="Arial" pitchFamily="34" charset="-122"/>
                 <a:cs typeface="Arial" pitchFamily="34" charset="-120"/>
               </a:rPr>
-              <a:t>mass of female Gentoo</a:t>
-            </a:r>
-            <a:endParaRPr lang="en-US" sz="770" dirty="0"/>
+              <a:t>mass of</a:t>
+            </a:r>
+            <a:endParaRPr lang="en-US" sz="1000" dirty="0"/>
+          </a:p>
+          <a:p>
+            <a:pPr algn="ctr" indent="0" marL="0">
+              <a:lnSpc>
+                <a:spcPct val="120000"/>
+              </a:lnSpc>
+              <a:buNone/>
+            </a:pPr>
+            <a:r>
+              <a:rPr lang="en-US" sz="1000" dirty="0">
+                <a:solidFill>
+                  <a:srgbClr val="1F2D3A"/>
+                </a:solidFill>
+                <a:latin typeface="Arial" pitchFamily="34" charset="0"/>
+                <a:ea typeface="Arial" pitchFamily="34" charset="-122"/>
+                <a:cs typeface="Arial" pitchFamily="34" charset="-120"/>
+              </a:rPr>
+              <a:t>female Gentoo</a:t>
+            </a:r>
+            <a:endParaRPr lang="en-US" sz="1000" dirty="0"/>
           </a:p>
         </p:txBody>
       </p:sp>
@@ -2111,27 +2251,27 @@
         </p:nvSpPr>
         <p:spPr>
           <a:xfrm>
-            <a:off x="2745943" y="2470526"/>
-            <a:ext cx="2035150" cy="166787"/>
-          </a:xfrm>
-          <a:prstGeom prst="rect">
-            <a:avLst/>
-          </a:prstGeom>
-          <a:noFill/>
-          <a:ln/>
-        </p:spPr>
-        <p:txBody>
-          <a:bodyPr wrap="square" lIns="0" tIns="0" rIns="0" bIns="0" rtlCol="0" anchor="ctr"/>
-          <a:lstStyle/>
-          <a:p>
-            <a:pPr algn="ctr" indent="0" marL="0">
-              <a:lnSpc>
-                <a:spcPct val="115000"/>
-              </a:lnSpc>
-              <a:buNone/>
-            </a:pPr>
-            <a:r>
-              <a:rPr lang="en-US" sz="670" i="1" dirty="0">
+            <a:off x="2572024" y="2829154"/>
+            <a:ext cx="1755648" cy="178308"/>
+          </a:xfrm>
+          <a:prstGeom prst="rect">
+            <a:avLst/>
+          </a:prstGeom>
+          <a:noFill/>
+          <a:ln/>
+        </p:spPr>
+        <p:txBody>
+          <a:bodyPr wrap="square" lIns="0" tIns="0" rIns="0" bIns="0" rtlCol="0" anchor="ctr"/>
+          <a:lstStyle/>
+          <a:p>
+            <a:pPr algn="ctr" indent="0" marL="0">
+              <a:lnSpc>
+                <a:spcPct val="120000"/>
+              </a:lnSpc>
+              <a:buNone/>
+            </a:pPr>
+            <a:r>
+              <a:rPr lang="en-US" sz="850" i="1" dirty="0">
                 <a:solidFill>
                   <a:srgbClr val="5B6570"/>
                 </a:solidFill>
@@ -2141,7 +2281,7 @@
               </a:rPr>
               <a:t>penguins</a:t>
             </a:r>
-            <a:endParaRPr lang="en-US" sz="670" dirty="0"/>
+            <a:endParaRPr lang="en-US" sz="850" dirty="0"/>
           </a:p>
         </p:txBody>
       </p:sp>
@@ -2153,12 +2293,12 @@
         </p:nvSpPr>
         <p:spPr>
           <a:xfrm>
-            <a:off x="4962144" y="2157801"/>
-            <a:ext cx="2095500" cy="495148"/>
+            <a:off x="4476902" y="2508199"/>
+            <a:ext cx="1808317" cy="523037"/>
           </a:xfrm>
           <a:prstGeom prst="roundRect">
             <a:avLst>
-              <a:gd name="adj" fmla="val 16620"/>
+              <a:gd name="adj" fmla="val 13986"/>
             </a:avLst>
           </a:prstGeom>
           <a:solidFill>
@@ -2166,7 +2306,7 @@
               <a:alpha val="15000"/>
             </a:srgbClr>
           </a:solidFill>
-          <a:ln w="13970">
+          <a:ln w="15240">
             <a:solidFill>
               <a:srgbClr val="6A9E5B"/>
             </a:solidFill>
@@ -2182,27 +2322,27 @@
         </p:nvSpPr>
         <p:spPr>
           <a:xfrm>
-            <a:off x="4992319" y="2189074"/>
-            <a:ext cx="2035150" cy="333573"/>
-          </a:xfrm>
-          <a:prstGeom prst="rect">
-            <a:avLst/>
-          </a:prstGeom>
-          <a:noFill/>
-          <a:ln/>
-        </p:spPr>
-        <p:txBody>
-          <a:bodyPr wrap="square" lIns="0" tIns="0" rIns="0" bIns="0" rtlCol="0" anchor="ctr"/>
-          <a:lstStyle/>
-          <a:p>
-            <a:pPr algn="ctr" indent="0" marL="0">
-              <a:lnSpc>
-                <a:spcPct val="115000"/>
-              </a:lnSpc>
-              <a:buNone/>
-            </a:pPr>
-            <a:r>
-              <a:rPr lang="en-US" sz="770" dirty="0">
+            <a:off x="4503237" y="2502256"/>
+            <a:ext cx="1755648" cy="356616"/>
+          </a:xfrm>
+          <a:prstGeom prst="rect">
+            <a:avLst/>
+          </a:prstGeom>
+          <a:noFill/>
+          <a:ln/>
+        </p:spPr>
+        <p:txBody>
+          <a:bodyPr wrap="square" lIns="0" tIns="0" rIns="0" bIns="0" rtlCol="0" anchor="ctr"/>
+          <a:lstStyle/>
+          <a:p>
+            <a:pPr algn="ctr" indent="0" marL="0">
+              <a:lnSpc>
+                <a:spcPct val="120000"/>
+              </a:lnSpc>
+              <a:buNone/>
+            </a:pPr>
+            <a:r>
+              <a:rPr lang="en-US" sz="1000" dirty="0">
                 <a:solidFill>
                   <a:srgbClr val="1F2D3A"/>
                 </a:solidFill>
@@ -2210,9 +2350,29 @@
                 <a:ea typeface="Arial" pitchFamily="34" charset="-122"/>
                 <a:cs typeface="Arial" pitchFamily="34" charset="-120"/>
               </a:rPr>
-              <a:t>weight of one species</a:t>
-            </a:r>
-            <a:endParaRPr lang="en-US" sz="770" dirty="0"/>
+              <a:t>weight of</a:t>
+            </a:r>
+            <a:endParaRPr lang="en-US" sz="1000" dirty="0"/>
+          </a:p>
+          <a:p>
+            <a:pPr algn="ctr" indent="0" marL="0">
+              <a:lnSpc>
+                <a:spcPct val="120000"/>
+              </a:lnSpc>
+              <a:buNone/>
+            </a:pPr>
+            <a:r>
+              <a:rPr lang="en-US" sz="1000" dirty="0">
+                <a:solidFill>
+                  <a:srgbClr val="1F2D3A"/>
+                </a:solidFill>
+                <a:latin typeface="Arial" pitchFamily="34" charset="0"/>
+                <a:ea typeface="Arial" pitchFamily="34" charset="-122"/>
+                <a:cs typeface="Arial" pitchFamily="34" charset="-120"/>
+              </a:rPr>
+              <a:t>one species</a:t>
+            </a:r>
+            <a:endParaRPr lang="en-US" sz="1000" dirty="0"/>
           </a:p>
         </p:txBody>
       </p:sp>
@@ -2224,27 +2384,27 @@
         </p:nvSpPr>
         <p:spPr>
           <a:xfrm>
-            <a:off x="4992319" y="2470526"/>
-            <a:ext cx="2035150" cy="166787"/>
-          </a:xfrm>
-          <a:prstGeom prst="rect">
-            <a:avLst/>
-          </a:prstGeom>
-          <a:noFill/>
-          <a:ln/>
-        </p:spPr>
-        <p:txBody>
-          <a:bodyPr wrap="square" lIns="0" tIns="0" rIns="0" bIns="0" rtlCol="0" anchor="ctr"/>
-          <a:lstStyle/>
-          <a:p>
-            <a:pPr algn="ctr" indent="0" marL="0">
-              <a:lnSpc>
-                <a:spcPct val="115000"/>
-              </a:lnSpc>
-              <a:buNone/>
-            </a:pPr>
-            <a:r>
-              <a:rPr lang="en-US" sz="670" i="1" dirty="0">
+            <a:off x="4503237" y="2829154"/>
+            <a:ext cx="1755648" cy="178308"/>
+          </a:xfrm>
+          <a:prstGeom prst="rect">
+            <a:avLst/>
+          </a:prstGeom>
+          <a:noFill/>
+          <a:ln/>
+        </p:spPr>
+        <p:txBody>
+          <a:bodyPr wrap="square" lIns="0" tIns="0" rIns="0" bIns="0" rtlCol="0" anchor="ctr"/>
+          <a:lstStyle/>
+          <a:p>
+            <a:pPr algn="ctr" indent="0" marL="0">
+              <a:lnSpc>
+                <a:spcPct val="120000"/>
+              </a:lnSpc>
+              <a:buNone/>
+            </a:pPr>
+            <a:r>
+              <a:rPr lang="en-US" sz="850" i="1" dirty="0">
                 <a:solidFill>
                   <a:srgbClr val="5B6570"/>
                 </a:solidFill>
@@ -2254,7 +2414,7 @@
               </a:rPr>
               <a:t>rodents</a:t>
             </a:r>
-            <a:endParaRPr lang="en-US" sz="670" dirty="0"/>
+            <a:endParaRPr lang="en-US" sz="850" dirty="0"/>
           </a:p>
         </p:txBody>
       </p:sp>
@@ -2266,12 +2426,12 @@
         </p:nvSpPr>
         <p:spPr>
           <a:xfrm>
-            <a:off x="7208520" y="2157801"/>
-            <a:ext cx="2095500" cy="495148"/>
+            <a:off x="6408115" y="2508199"/>
+            <a:ext cx="1808317" cy="523037"/>
           </a:xfrm>
           <a:prstGeom prst="roundRect">
             <a:avLst>
-              <a:gd name="adj" fmla="val 16620"/>
+              <a:gd name="adj" fmla="val 13986"/>
             </a:avLst>
           </a:prstGeom>
           <a:solidFill>
@@ -2279,7 +2439,7 @@
               <a:alpha val="15000"/>
             </a:srgbClr>
           </a:solidFill>
-          <a:ln w="13970">
+          <a:ln w="15240">
             <a:solidFill>
               <a:srgbClr val="6A9E5B"/>
             </a:solidFill>
@@ -2295,27 +2455,27 @@
         </p:nvSpPr>
         <p:spPr>
           <a:xfrm>
-            <a:off x="7238695" y="2157801"/>
-            <a:ext cx="2035150" cy="333573"/>
-          </a:xfrm>
-          <a:prstGeom prst="rect">
-            <a:avLst/>
-          </a:prstGeom>
-          <a:noFill/>
-          <a:ln/>
-        </p:spPr>
-        <p:txBody>
-          <a:bodyPr wrap="square" lIns="0" tIns="0" rIns="0" bIns="0" rtlCol="0" anchor="ctr"/>
-          <a:lstStyle/>
-          <a:p>
-            <a:pPr algn="ctr" indent="0" marL="0">
-              <a:lnSpc>
-                <a:spcPct val="115000"/>
-              </a:lnSpc>
-              <a:buNone/>
-            </a:pPr>
-            <a:r>
-              <a:rPr lang="en-US" sz="770" dirty="0">
+            <a:off x="6434450" y="2502256"/>
+            <a:ext cx="1755648" cy="356616"/>
+          </a:xfrm>
+          <a:prstGeom prst="rect">
+            <a:avLst/>
+          </a:prstGeom>
+          <a:noFill/>
+          <a:ln/>
+        </p:spPr>
+        <p:txBody>
+          <a:bodyPr wrap="square" lIns="0" tIns="0" rIns="0" bIns="0" rtlCol="0" anchor="ctr"/>
+          <a:lstStyle/>
+          <a:p>
+            <a:pPr algn="ctr" indent="0" marL="0">
+              <a:lnSpc>
+                <a:spcPct val="120000"/>
+              </a:lnSpc>
+              <a:buNone/>
+            </a:pPr>
+            <a:r>
+              <a:rPr lang="en-US" sz="1000" dirty="0">
                 <a:solidFill>
                   <a:srgbClr val="1F2D3A"/>
                 </a:solidFill>
@@ -2325,17 +2485,17 @@
               </a:rPr>
               <a:t>mean catch, counting</a:t>
             </a:r>
-            <a:endParaRPr lang="en-US" sz="770" dirty="0"/>
-          </a:p>
-          <a:p>
-            <a:pPr algn="ctr" indent="0" marL="0">
-              <a:lnSpc>
-                <a:spcPct val="115000"/>
-              </a:lnSpc>
-              <a:buNone/>
-            </a:pPr>
-            <a:r>
-              <a:rPr lang="en-US" sz="770" dirty="0">
+            <a:endParaRPr lang="en-US" sz="1000" dirty="0"/>
+          </a:p>
+          <a:p>
+            <a:pPr algn="ctr" indent="0" marL="0">
+              <a:lnSpc>
+                <a:spcPct val="120000"/>
+              </a:lnSpc>
+              <a:buNone/>
+            </a:pPr>
+            <a:r>
+              <a:rPr lang="en-US" sz="1000" dirty="0">
                 <a:solidFill>
                   <a:srgbClr val="1F2D3A"/>
                 </a:solidFill>
@@ -2345,7 +2505,7 @@
               </a:rPr>
               <a:t>empty plot-years</a:t>
             </a:r>
-            <a:endParaRPr lang="en-US" sz="770" dirty="0"/>
+            <a:endParaRPr lang="en-US" sz="1000" dirty="0"/>
           </a:p>
         </p:txBody>
       </p:sp>
@@ -2357,27 +2517,27 @@
         </p:nvSpPr>
         <p:spPr>
           <a:xfrm>
-            <a:off x="7238695" y="2470526"/>
-            <a:ext cx="2035150" cy="166787"/>
-          </a:xfrm>
-          <a:prstGeom prst="rect">
-            <a:avLst/>
-          </a:prstGeom>
-          <a:noFill/>
-          <a:ln/>
-        </p:spPr>
-        <p:txBody>
-          <a:bodyPr wrap="square" lIns="0" tIns="0" rIns="0" bIns="0" rtlCol="0" anchor="ctr"/>
-          <a:lstStyle/>
-          <a:p>
-            <a:pPr algn="ctr" indent="0" marL="0">
-              <a:lnSpc>
-                <a:spcPct val="115000"/>
-              </a:lnSpc>
-              <a:buNone/>
-            </a:pPr>
-            <a:r>
-              <a:rPr lang="en-US" sz="670" i="1" dirty="0">
+            <a:off x="6434450" y="2829154"/>
+            <a:ext cx="1755648" cy="178308"/>
+          </a:xfrm>
+          <a:prstGeom prst="rect">
+            <a:avLst/>
+          </a:prstGeom>
+          <a:noFill/>
+          <a:ln/>
+        </p:spPr>
+        <p:txBody>
+          <a:bodyPr wrap="square" lIns="0" tIns="0" rIns="0" bIns="0" rtlCol="0" anchor="ctr"/>
+          <a:lstStyle/>
+          <a:p>
+            <a:pPr algn="ctr" indent="0" marL="0">
+              <a:lnSpc>
+                <a:spcPct val="120000"/>
+              </a:lnSpc>
+              <a:buNone/>
+            </a:pPr>
+            <a:r>
+              <a:rPr lang="en-US" sz="850" i="1" dirty="0">
                 <a:solidFill>
                   <a:srgbClr val="5B6570"/>
                 </a:solidFill>
@@ -2387,7 +2547,7 @@
               </a:rPr>
               <a:t>rodents</a:t>
             </a:r>
-            <a:endParaRPr lang="en-US" sz="670" dirty="0"/>
+            <a:endParaRPr lang="en-US" sz="850" dirty="0"/>
           </a:p>
         </p:txBody>
       </p:sp>
@@ -2399,8 +2559,8 @@
         </p:nvSpPr>
         <p:spPr>
           <a:xfrm>
-            <a:off x="321869" y="2780645"/>
-            <a:ext cx="2212848" cy="250180"/>
+            <a:off x="298460" y="3150108"/>
+            <a:ext cx="2106778" cy="261518"/>
           </a:xfrm>
           <a:prstGeom prst="rect">
             <a:avLst/>
@@ -2414,12 +2574,12 @@
           <a:p>
             <a:pPr algn="r" indent="0" marL="0">
               <a:lnSpc>
-                <a:spcPct val="115000"/>
-              </a:lnSpc>
-              <a:buNone/>
-            </a:pPr>
-            <a:r>
-              <a:rPr lang="en-US" sz="920" b="1" dirty="0">
+                <a:spcPct val="120000"/>
+              </a:lnSpc>
+              <a:buNone/>
+            </a:pPr>
+            <a:r>
+              <a:rPr lang="en-US" sz="1150" b="1" dirty="0">
                 <a:solidFill>
                   <a:srgbClr val="1F2D3A"/>
                 </a:solidFill>
@@ -2429,39 +2589,59 @@
               </a:rPr>
               <a:t>Fitting a model</a:t>
             </a:r>
+            <a:endParaRPr lang="en-US" sz="1150" dirty="0"/>
+          </a:p>
+        </p:txBody>
+      </p:sp>
+      <p:sp>
+        <p:nvSpPr>
+          <p:cNvPr id="41" name="Text 39"/>
+          <p:cNvSpPr/>
+          <p:nvPr/>
+        </p:nvSpPr>
+        <p:spPr>
+          <a:xfrm>
+            <a:off x="298460" y="3423514"/>
+            <a:ext cx="2106778" cy="356616"/>
+          </a:xfrm>
+          <a:prstGeom prst="rect">
+            <a:avLst/>
+          </a:prstGeom>
+          <a:noFill/>
+          <a:ln/>
+        </p:spPr>
+        <p:txBody>
+          <a:bodyPr wrap="square" lIns="0" tIns="0" rIns="0" bIns="0" rtlCol="0" anchor="ctr"/>
+          <a:lstStyle/>
+          <a:p>
+            <a:pPr algn="r" indent="0" marL="0">
+              <a:lnSpc>
+                <a:spcPct val="120000"/>
+              </a:lnSpc>
+              <a:buNone/>
+            </a:pPr>
+            <a:r>
+              <a:rPr lang="en-US" sz="920" dirty="0">
+                <a:solidFill>
+                  <a:srgbClr val="5B6570"/>
+                </a:solidFill>
+                <a:latin typeface="Arial" pitchFamily="34" charset="0"/>
+                <a:ea typeface="Arial" pitchFamily="34" charset="-122"/>
+                <a:cs typeface="Arial" pitchFamily="34" charset="-120"/>
+              </a:rPr>
+              <a:t>the split, the seed,</a:t>
+            </a:r>
             <a:endParaRPr lang="en-US" sz="920" dirty="0"/>
           </a:p>
-        </p:txBody>
-      </p:sp>
-      <p:sp>
-        <p:nvSpPr>
-          <p:cNvPr id="41" name="Text 39"/>
-          <p:cNvSpPr/>
-          <p:nvPr/>
-        </p:nvSpPr>
-        <p:spPr>
-          <a:xfrm>
-            <a:off x="321869" y="3030825"/>
-            <a:ext cx="2212848" cy="333573"/>
-          </a:xfrm>
-          <a:prstGeom prst="rect">
-            <a:avLst/>
-          </a:prstGeom>
-          <a:noFill/>
-          <a:ln/>
-        </p:spPr>
-        <p:txBody>
-          <a:bodyPr wrap="square" lIns="0" tIns="0" rIns="0" bIns="0" rtlCol="0" anchor="ctr"/>
-          <a:lstStyle/>
           <a:p>
             <a:pPr algn="r" indent="0" marL="0">
               <a:lnSpc>
-                <a:spcPct val="115000"/>
-              </a:lnSpc>
-              <a:buNone/>
-            </a:pPr>
-            <a:r>
-              <a:rPr lang="en-US" sz="730" dirty="0">
+                <a:spcPct val="120000"/>
+              </a:lnSpc>
+              <a:buNone/>
+            </a:pPr>
+            <a:r>
+              <a:rPr lang="en-US" sz="920" dirty="0">
                 <a:solidFill>
                   <a:srgbClr val="5B6570"/>
                 </a:solidFill>
@@ -2469,29 +2649,9 @@
                 <a:ea typeface="Arial" pitchFamily="34" charset="-122"/>
                 <a:cs typeface="Arial" pitchFamily="34" charset="-120"/>
               </a:rPr>
-              <a:t>the split, the seed,</a:t>
-            </a:r>
-            <a:endParaRPr lang="en-US" sz="730" dirty="0"/>
-          </a:p>
-          <a:p>
-            <a:pPr algn="r" indent="0" marL="0">
-              <a:lnSpc>
-                <a:spcPct val="115000"/>
-              </a:lnSpc>
-              <a:buNone/>
-            </a:pPr>
-            <a:r>
-              <a:rPr lang="en-US" sz="730" dirty="0">
-                <a:solidFill>
-                  <a:srgbClr val="5B6570"/>
-                </a:solidFill>
-                <a:latin typeface="Arial" pitchFamily="34" charset="0"/>
-                <a:ea typeface="Arial" pitchFamily="34" charset="-122"/>
-                <a:cs typeface="Arial" pitchFamily="34" charset="-120"/>
-              </a:rPr>
               <a:t>the scaling</a:t>
             </a:r>
-            <a:endParaRPr lang="en-US" sz="730" dirty="0"/>
+            <a:endParaRPr lang="en-US" sz="920" dirty="0"/>
           </a:p>
         </p:txBody>
       </p:sp>
@@ -2503,12 +2663,12 @@
         </p:nvSpPr>
         <p:spPr>
           <a:xfrm>
-            <a:off x="2715768" y="2767614"/>
-            <a:ext cx="2095500" cy="495148"/>
+            <a:off x="2545690" y="3156052"/>
+            <a:ext cx="1808317" cy="523037"/>
           </a:xfrm>
           <a:prstGeom prst="roundRect">
             <a:avLst>
-              <a:gd name="adj" fmla="val 16620"/>
+              <a:gd name="adj" fmla="val 13986"/>
             </a:avLst>
           </a:prstGeom>
           <a:solidFill>
@@ -2516,7 +2676,7 @@
               <a:alpha val="15000"/>
             </a:srgbClr>
           </a:solidFill>
-          <a:ln w="13970">
+          <a:ln w="15240">
             <a:solidFill>
               <a:srgbClr val="56B4E9"/>
             </a:solidFill>
@@ -2532,27 +2692,27 @@
         </p:nvSpPr>
         <p:spPr>
           <a:xfrm>
-            <a:off x="2745943" y="2798887"/>
-            <a:ext cx="2035150" cy="333573"/>
-          </a:xfrm>
-          <a:prstGeom prst="rect">
-            <a:avLst/>
-          </a:prstGeom>
-          <a:noFill/>
-          <a:ln/>
-        </p:spPr>
-        <p:txBody>
-          <a:bodyPr wrap="square" lIns="0" tIns="0" rIns="0" bIns="0" rtlCol="0" anchor="ctr"/>
-          <a:lstStyle/>
-          <a:p>
-            <a:pPr algn="ctr" indent="0" marL="0">
-              <a:lnSpc>
-                <a:spcPct val="115000"/>
-              </a:lnSpc>
-              <a:buNone/>
-            </a:pPr>
-            <a:r>
-              <a:rPr lang="en-US" sz="770" dirty="0">
+            <a:off x="2572024" y="3150108"/>
+            <a:ext cx="1755648" cy="356616"/>
+          </a:xfrm>
+          <a:prstGeom prst="rect">
+            <a:avLst/>
+          </a:prstGeom>
+          <a:noFill/>
+          <a:ln/>
+        </p:spPr>
+        <p:txBody>
+          <a:bodyPr wrap="square" lIns="0" tIns="0" rIns="0" bIns="0" rtlCol="0" anchor="ctr"/>
+          <a:lstStyle/>
+          <a:p>
+            <a:pPr algn="ctr" indent="0" marL="0">
+              <a:lnSpc>
+                <a:spcPct val="120000"/>
+              </a:lnSpc>
+              <a:buNone/>
+            </a:pPr>
+            <a:r>
+              <a:rPr lang="en-US" sz="1000" dirty="0">
                 <a:solidFill>
                   <a:srgbClr val="1F2D3A"/>
                 </a:solidFill>
@@ -2560,9 +2720,29 @@
                 <a:ea typeface="Arial" pitchFamily="34" charset="-122"/>
                 <a:cs typeface="Arial" pitchFamily="34" charset="-120"/>
               </a:rPr>
-              <a:t>penguin sex classifier</a:t>
-            </a:r>
-            <a:endParaRPr lang="en-US" sz="770" dirty="0"/>
+              <a:t>penguin sex</a:t>
+            </a:r>
+            <a:endParaRPr lang="en-US" sz="1000" dirty="0"/>
+          </a:p>
+          <a:p>
+            <a:pPr algn="ctr" indent="0" marL="0">
+              <a:lnSpc>
+                <a:spcPct val="120000"/>
+              </a:lnSpc>
+              <a:buNone/>
+            </a:pPr>
+            <a:r>
+              <a:rPr lang="en-US" sz="1000" dirty="0">
+                <a:solidFill>
+                  <a:srgbClr val="1F2D3A"/>
+                </a:solidFill>
+                <a:latin typeface="Arial" pitchFamily="34" charset="0"/>
+                <a:ea typeface="Arial" pitchFamily="34" charset="-122"/>
+                <a:cs typeface="Arial" pitchFamily="34" charset="-120"/>
+              </a:rPr>
+              <a:t>classifier</a:t>
+            </a:r>
+            <a:endParaRPr lang="en-US" sz="1000" dirty="0"/>
           </a:p>
         </p:txBody>
       </p:sp>
@@ -2574,27 +2754,27 @@
         </p:nvSpPr>
         <p:spPr>
           <a:xfrm>
-            <a:off x="2745943" y="3080339"/>
-            <a:ext cx="2035150" cy="166787"/>
-          </a:xfrm>
-          <a:prstGeom prst="rect">
-            <a:avLst/>
-          </a:prstGeom>
-          <a:noFill/>
-          <a:ln/>
-        </p:spPr>
-        <p:txBody>
-          <a:bodyPr wrap="square" lIns="0" tIns="0" rIns="0" bIns="0" rtlCol="0" anchor="ctr"/>
-          <a:lstStyle/>
-          <a:p>
-            <a:pPr algn="ctr" indent="0" marL="0">
-              <a:lnSpc>
-                <a:spcPct val="115000"/>
-              </a:lnSpc>
-              <a:buNone/>
-            </a:pPr>
-            <a:r>
-              <a:rPr lang="en-US" sz="670" i="1" dirty="0">
+            <a:off x="2572024" y="3477006"/>
+            <a:ext cx="1755648" cy="178308"/>
+          </a:xfrm>
+          <a:prstGeom prst="rect">
+            <a:avLst/>
+          </a:prstGeom>
+          <a:noFill/>
+          <a:ln/>
+        </p:spPr>
+        <p:txBody>
+          <a:bodyPr wrap="square" lIns="0" tIns="0" rIns="0" bIns="0" rtlCol="0" anchor="ctr"/>
+          <a:lstStyle/>
+          <a:p>
+            <a:pPr algn="ctr" indent="0" marL="0">
+              <a:lnSpc>
+                <a:spcPct val="120000"/>
+              </a:lnSpc>
+              <a:buNone/>
+            </a:pPr>
+            <a:r>
+              <a:rPr lang="en-US" sz="850" i="1" dirty="0">
                 <a:solidFill>
                   <a:srgbClr val="5B6570"/>
                 </a:solidFill>
@@ -2604,7 +2784,7 @@
               </a:rPr>
               <a:t>penguins</a:t>
             </a:r>
-            <a:endParaRPr lang="en-US" sz="670" dirty="0"/>
+            <a:endParaRPr lang="en-US" sz="850" dirty="0"/>
           </a:p>
         </p:txBody>
       </p:sp>
@@ -2616,12 +2796,12 @@
         </p:nvSpPr>
         <p:spPr>
           <a:xfrm>
-            <a:off x="4962144" y="2767614"/>
-            <a:ext cx="2095500" cy="495148"/>
+            <a:off x="4476902" y="3156052"/>
+            <a:ext cx="1808317" cy="523037"/>
           </a:xfrm>
           <a:prstGeom prst="roundRect">
             <a:avLst>
-              <a:gd name="adj" fmla="val 16620"/>
+              <a:gd name="adj" fmla="val 13986"/>
             </a:avLst>
           </a:prstGeom>
           <a:solidFill>
@@ -2629,7 +2809,7 @@
               <a:alpha val="15000"/>
             </a:srgbClr>
           </a:solidFill>
-          <a:ln w="13970">
+          <a:ln w="15240">
             <a:solidFill>
               <a:srgbClr val="E69F00"/>
             </a:solidFill>
@@ -2645,27 +2825,27 @@
         </p:nvSpPr>
         <p:spPr>
           <a:xfrm>
-            <a:off x="4992319" y="2798887"/>
-            <a:ext cx="2035150" cy="333573"/>
-          </a:xfrm>
-          <a:prstGeom prst="rect">
-            <a:avLst/>
-          </a:prstGeom>
-          <a:noFill/>
-          <a:ln/>
-        </p:spPr>
-        <p:txBody>
-          <a:bodyPr wrap="square" lIns="0" tIns="0" rIns="0" bIns="0" rtlCol="0" anchor="ctr"/>
-          <a:lstStyle/>
-          <a:p>
-            <a:pPr algn="ctr" indent="0" marL="0">
-              <a:lnSpc>
-                <a:spcPct val="115000"/>
-              </a:lnSpc>
-              <a:buNone/>
-            </a:pPr>
-            <a:r>
-              <a:rPr lang="en-US" sz="770" dirty="0">
+            <a:off x="4503237" y="3150108"/>
+            <a:ext cx="1755648" cy="356616"/>
+          </a:xfrm>
+          <a:prstGeom prst="rect">
+            <a:avLst/>
+          </a:prstGeom>
+          <a:noFill/>
+          <a:ln/>
+        </p:spPr>
+        <p:txBody>
+          <a:bodyPr wrap="square" lIns="0" tIns="0" rIns="0" bIns="0" rtlCol="0" anchor="ctr"/>
+          <a:lstStyle/>
+          <a:p>
+            <a:pPr algn="ctr" indent="0" marL="0">
+              <a:lnSpc>
+                <a:spcPct val="120000"/>
+              </a:lnSpc>
+              <a:buNone/>
+            </a:pPr>
+            <a:r>
+              <a:rPr lang="en-US" sz="1000" dirty="0">
                 <a:solidFill>
                   <a:srgbClr val="1F2D3A"/>
                 </a:solidFill>
@@ -2673,9 +2853,29 @@
                 <a:ea typeface="Arial" pitchFamily="34" charset="-122"/>
                 <a:cs typeface="Arial" pitchFamily="34" charset="-120"/>
               </a:rPr>
-              <a:t>iris species classifier</a:t>
-            </a:r>
-            <a:endParaRPr lang="en-US" sz="770" dirty="0"/>
+              <a:t>iris species</a:t>
+            </a:r>
+            <a:endParaRPr lang="en-US" sz="1000" dirty="0"/>
+          </a:p>
+          <a:p>
+            <a:pPr algn="ctr" indent="0" marL="0">
+              <a:lnSpc>
+                <a:spcPct val="120000"/>
+              </a:lnSpc>
+              <a:buNone/>
+            </a:pPr>
+            <a:r>
+              <a:rPr lang="en-US" sz="1000" dirty="0">
+                <a:solidFill>
+                  <a:srgbClr val="1F2D3A"/>
+                </a:solidFill>
+                <a:latin typeface="Arial" pitchFamily="34" charset="0"/>
+                <a:ea typeface="Arial" pitchFamily="34" charset="-122"/>
+                <a:cs typeface="Arial" pitchFamily="34" charset="-120"/>
+              </a:rPr>
+              <a:t>classifier</a:t>
+            </a:r>
+            <a:endParaRPr lang="en-US" sz="1000" dirty="0"/>
           </a:p>
         </p:txBody>
       </p:sp>
@@ -2687,27 +2887,27 @@
         </p:nvSpPr>
         <p:spPr>
           <a:xfrm>
-            <a:off x="4992319" y="3080339"/>
-            <a:ext cx="2035150" cy="166787"/>
-          </a:xfrm>
-          <a:prstGeom prst="rect">
-            <a:avLst/>
-          </a:prstGeom>
-          <a:noFill/>
-          <a:ln/>
-        </p:spPr>
-        <p:txBody>
-          <a:bodyPr wrap="square" lIns="0" tIns="0" rIns="0" bIns="0" rtlCol="0" anchor="ctr"/>
-          <a:lstStyle/>
-          <a:p>
-            <a:pPr algn="ctr" indent="0" marL="0">
-              <a:lnSpc>
-                <a:spcPct val="115000"/>
-              </a:lnSpc>
-              <a:buNone/>
-            </a:pPr>
-            <a:r>
-              <a:rPr lang="en-US" sz="670" i="1" dirty="0">
+            <a:off x="4503237" y="3477006"/>
+            <a:ext cx="1755648" cy="178308"/>
+          </a:xfrm>
+          <a:prstGeom prst="rect">
+            <a:avLst/>
+          </a:prstGeom>
+          <a:noFill/>
+          <a:ln/>
+        </p:spPr>
+        <p:txBody>
+          <a:bodyPr wrap="square" lIns="0" tIns="0" rIns="0" bIns="0" rtlCol="0" anchor="ctr"/>
+          <a:lstStyle/>
+          <a:p>
+            <a:pPr algn="ctr" indent="0" marL="0">
+              <a:lnSpc>
+                <a:spcPct val="120000"/>
+              </a:lnSpc>
+              <a:buNone/>
+            </a:pPr>
+            <a:r>
+              <a:rPr lang="en-US" sz="850" i="1" dirty="0">
                 <a:solidFill>
                   <a:srgbClr val="5B6570"/>
                 </a:solidFill>
@@ -2717,7 +2917,7 @@
               </a:rPr>
               <a:t>iris</a:t>
             </a:r>
-            <a:endParaRPr lang="en-US" sz="670" dirty="0"/>
+            <a:endParaRPr lang="en-US" sz="850" dirty="0"/>
           </a:p>
         </p:txBody>
       </p:sp>
@@ -2729,12 +2929,12 @@
         </p:nvSpPr>
         <p:spPr>
           <a:xfrm>
-            <a:off x="7208520" y="2767614"/>
-            <a:ext cx="2095500" cy="495148"/>
+            <a:off x="6408115" y="3156052"/>
+            <a:ext cx="1808317" cy="523037"/>
           </a:xfrm>
           <a:prstGeom prst="roundRect">
             <a:avLst>
-              <a:gd name="adj" fmla="val 16620"/>
+              <a:gd name="adj" fmla="val 13986"/>
             </a:avLst>
           </a:prstGeom>
           <a:solidFill>
@@ -2742,7 +2942,7 @@
               <a:alpha val="15000"/>
             </a:srgbClr>
           </a:solidFill>
-          <a:ln w="13970">
+          <a:ln w="15240">
             <a:solidFill>
               <a:srgbClr val="6A9E5B"/>
             </a:solidFill>
@@ -2758,27 +2958,27 @@
         </p:nvSpPr>
         <p:spPr>
           <a:xfrm>
-            <a:off x="7238695" y="2798887"/>
-            <a:ext cx="2035150" cy="333573"/>
-          </a:xfrm>
-          <a:prstGeom prst="rect">
-            <a:avLst/>
-          </a:prstGeom>
-          <a:noFill/>
-          <a:ln/>
-        </p:spPr>
-        <p:txBody>
-          <a:bodyPr wrap="square" lIns="0" tIns="0" rIns="0" bIns="0" rtlCol="0" anchor="ctr"/>
-          <a:lstStyle/>
-          <a:p>
-            <a:pPr algn="ctr" indent="0" marL="0">
-              <a:lnSpc>
-                <a:spcPct val="115000"/>
-              </a:lnSpc>
-              <a:buNone/>
-            </a:pPr>
-            <a:r>
-              <a:rPr lang="en-US" sz="770" dirty="0">
+            <a:off x="6434450" y="3150108"/>
+            <a:ext cx="1755648" cy="356616"/>
+          </a:xfrm>
+          <a:prstGeom prst="rect">
+            <a:avLst/>
+          </a:prstGeom>
+          <a:noFill/>
+          <a:ln/>
+        </p:spPr>
+        <p:txBody>
+          <a:bodyPr wrap="square" lIns="0" tIns="0" rIns="0" bIns="0" rtlCol="0" anchor="ctr"/>
+          <a:lstStyle/>
+          <a:p>
+            <a:pPr algn="ctr" indent="0" marL="0">
+              <a:lnSpc>
+                <a:spcPct val="120000"/>
+              </a:lnSpc>
+              <a:buNone/>
+            </a:pPr>
+            <a:r>
+              <a:rPr lang="en-US" sz="1000" dirty="0">
                 <a:solidFill>
                   <a:srgbClr val="1F2D3A"/>
                 </a:solidFill>
@@ -2786,9 +2986,29 @@
                 <a:ea typeface="Arial" pitchFamily="34" charset="-122"/>
                 <a:cs typeface="Arial" pitchFamily="34" charset="-120"/>
               </a:rPr>
-              <a:t>rodent species classifier</a:t>
-            </a:r>
-            <a:endParaRPr lang="en-US" sz="770" dirty="0"/>
+              <a:t>rodent species</a:t>
+            </a:r>
+            <a:endParaRPr lang="en-US" sz="1000" dirty="0"/>
+          </a:p>
+          <a:p>
+            <a:pPr algn="ctr" indent="0" marL="0">
+              <a:lnSpc>
+                <a:spcPct val="120000"/>
+              </a:lnSpc>
+              <a:buNone/>
+            </a:pPr>
+            <a:r>
+              <a:rPr lang="en-US" sz="1000" dirty="0">
+                <a:solidFill>
+                  <a:srgbClr val="1F2D3A"/>
+                </a:solidFill>
+                <a:latin typeface="Arial" pitchFamily="34" charset="0"/>
+                <a:ea typeface="Arial" pitchFamily="34" charset="-122"/>
+                <a:cs typeface="Arial" pitchFamily="34" charset="-120"/>
+              </a:rPr>
+              <a:t>classifier</a:t>
+            </a:r>
+            <a:endParaRPr lang="en-US" sz="1000" dirty="0"/>
           </a:p>
         </p:txBody>
       </p:sp>
@@ -2800,27 +3020,27 @@
         </p:nvSpPr>
         <p:spPr>
           <a:xfrm>
-            <a:off x="7238695" y="3080339"/>
-            <a:ext cx="2035150" cy="166787"/>
-          </a:xfrm>
-          <a:prstGeom prst="rect">
-            <a:avLst/>
-          </a:prstGeom>
-          <a:noFill/>
-          <a:ln/>
-        </p:spPr>
-        <p:txBody>
-          <a:bodyPr wrap="square" lIns="0" tIns="0" rIns="0" bIns="0" rtlCol="0" anchor="ctr"/>
-          <a:lstStyle/>
-          <a:p>
-            <a:pPr algn="ctr" indent="0" marL="0">
-              <a:lnSpc>
-                <a:spcPct val="115000"/>
-              </a:lnSpc>
-              <a:buNone/>
-            </a:pPr>
-            <a:r>
-              <a:rPr lang="en-US" sz="670" i="1" dirty="0">
+            <a:off x="6434450" y="3477006"/>
+            <a:ext cx="1755648" cy="178308"/>
+          </a:xfrm>
+          <a:prstGeom prst="rect">
+            <a:avLst/>
+          </a:prstGeom>
+          <a:noFill/>
+          <a:ln/>
+        </p:spPr>
+        <p:txBody>
+          <a:bodyPr wrap="square" lIns="0" tIns="0" rIns="0" bIns="0" rtlCol="0" anchor="ctr"/>
+          <a:lstStyle/>
+          <a:p>
+            <a:pPr algn="ctr" indent="0" marL="0">
+              <a:lnSpc>
+                <a:spcPct val="120000"/>
+              </a:lnSpc>
+              <a:buNone/>
+            </a:pPr>
+            <a:r>
+              <a:rPr lang="en-US" sz="850" i="1" dirty="0">
                 <a:solidFill>
                   <a:srgbClr val="5B6570"/>
                 </a:solidFill>
@@ -2830,7 +3050,7 @@
               </a:rPr>
               <a:t>rodents</a:t>
             </a:r>
-            <a:endParaRPr lang="en-US" sz="670" dirty="0"/>
+            <a:endParaRPr lang="en-US" sz="850" dirty="0"/>
           </a:p>
         </p:txBody>
       </p:sp>
@@ -2842,12 +3062,12 @@
         </p:nvSpPr>
         <p:spPr>
           <a:xfrm>
-            <a:off x="2816352" y="3533790"/>
-            <a:ext cx="191110" cy="198059"/>
+            <a:off x="2589581" y="4041648"/>
+            <a:ext cx="166787" cy="178308"/>
           </a:xfrm>
           <a:prstGeom prst="roundRect">
             <a:avLst>
-              <a:gd name="adj" fmla="val 23923"/>
+              <a:gd name="adj" fmla="val 27412"/>
             </a:avLst>
           </a:prstGeom>
           <a:solidFill>
@@ -2871,8 +3091,8 @@
         </p:nvSpPr>
         <p:spPr>
           <a:xfrm>
-            <a:off x="3087929" y="3539002"/>
-            <a:ext cx="1307592" cy="187635"/>
+            <a:off x="2835372" y="4029761"/>
+            <a:ext cx="1228954" cy="202082"/>
           </a:xfrm>
           <a:prstGeom prst="rect">
             <a:avLst/>
@@ -2886,12 +3106,12 @@
           <a:p>
             <a:pPr algn="l" indent="0" marL="0">
               <a:lnSpc>
-                <a:spcPct val="115000"/>
-              </a:lnSpc>
-              <a:buNone/>
-            </a:pPr>
-            <a:r>
-              <a:rPr lang="en-US" sz="750" dirty="0">
+                <a:spcPct val="120000"/>
+              </a:lnSpc>
+              <a:buNone/>
+            </a:pPr>
+            <a:r>
+              <a:rPr lang="en-US" sz="950" dirty="0">
                 <a:solidFill>
                   <a:srgbClr val="5B6570"/>
                 </a:solidFill>
@@ -2901,7 +3121,7 @@
               </a:rPr>
               <a:t>iris (2)</a:t>
             </a:r>
-            <a:endParaRPr lang="en-US" sz="750" dirty="0"/>
+            <a:endParaRPr lang="en-US" sz="950" dirty="0"/>
           </a:p>
         </p:txBody>
       </p:sp>
@@ -2913,12 +3133,12 @@
         </p:nvSpPr>
         <p:spPr>
           <a:xfrm>
-            <a:off x="4375404" y="3533790"/>
-            <a:ext cx="191110" cy="198059"/>
+            <a:off x="3994099" y="4041648"/>
+            <a:ext cx="166787" cy="178308"/>
           </a:xfrm>
           <a:prstGeom prst="roundRect">
             <a:avLst>
-              <a:gd name="adj" fmla="val 23923"/>
+              <a:gd name="adj" fmla="val 27412"/>
             </a:avLst>
           </a:prstGeom>
           <a:solidFill>
@@ -2942,8 +3162,8 @@
         </p:nvSpPr>
         <p:spPr>
           <a:xfrm>
-            <a:off x="4646981" y="3539002"/>
-            <a:ext cx="1307592" cy="187635"/>
+            <a:off x="4239890" y="4029761"/>
+            <a:ext cx="1228954" cy="202082"/>
           </a:xfrm>
           <a:prstGeom prst="rect">
             <a:avLst/>
@@ -2957,12 +3177,12 @@
           <a:p>
             <a:pPr algn="l" indent="0" marL="0">
               <a:lnSpc>
-                <a:spcPct val="115000"/>
-              </a:lnSpc>
-              <a:buNone/>
-            </a:pPr>
-            <a:r>
-              <a:rPr lang="en-US" sz="750" dirty="0">
+                <a:spcPct val="120000"/>
+              </a:lnSpc>
+              <a:buNone/>
+            </a:pPr>
+            <a:r>
+              <a:rPr lang="en-US" sz="950" dirty="0">
                 <a:solidFill>
                   <a:srgbClr val="5B6570"/>
                 </a:solidFill>
@@ -2972,7 +3192,7 @@
               </a:rPr>
               <a:t>penguins (3)</a:t>
             </a:r>
-            <a:endParaRPr lang="en-US" sz="750" dirty="0"/>
+            <a:endParaRPr lang="en-US" sz="950" dirty="0"/>
           </a:p>
         </p:txBody>
       </p:sp>
@@ -2984,12 +3204,12 @@
         </p:nvSpPr>
         <p:spPr>
           <a:xfrm>
-            <a:off x="5934456" y="3533790"/>
-            <a:ext cx="191110" cy="198059"/>
+            <a:off x="5398618" y="4041648"/>
+            <a:ext cx="166787" cy="178308"/>
           </a:xfrm>
           <a:prstGeom prst="roundRect">
             <a:avLst>
-              <a:gd name="adj" fmla="val 23923"/>
+              <a:gd name="adj" fmla="val 27412"/>
             </a:avLst>
           </a:prstGeom>
           <a:solidFill>
@@ -3013,8 +3233,8 @@
         </p:nvSpPr>
         <p:spPr>
           <a:xfrm>
-            <a:off x="6206033" y="3539002"/>
-            <a:ext cx="1307592" cy="187635"/>
+            <a:off x="5644408" y="4029761"/>
+            <a:ext cx="1228954" cy="202082"/>
           </a:xfrm>
           <a:prstGeom prst="rect">
             <a:avLst/>
@@ -3028,12 +3248,12 @@
           <a:p>
             <a:pPr algn="l" indent="0" marL="0">
               <a:lnSpc>
-                <a:spcPct val="115000"/>
-              </a:lnSpc>
-              <a:buNone/>
-            </a:pPr>
-            <a:r>
-              <a:rPr lang="en-US" sz="750" dirty="0">
+                <a:spcPct val="120000"/>
+              </a:lnSpc>
+              <a:buNone/>
+            </a:pPr>
+            <a:r>
+              <a:rPr lang="en-US" sz="950" dirty="0">
                 <a:solidFill>
                   <a:srgbClr val="5B6570"/>
                 </a:solidFill>
@@ -3043,7 +3263,7 @@
               </a:rPr>
               <a:t>rodents (6)</a:t>
             </a:r>
-            <a:endParaRPr lang="en-US" sz="750" dirty="0"/>
+            <a:endParaRPr lang="en-US" sz="950" dirty="0"/>
           </a:p>
         </p:txBody>
       </p:sp>
@@ -3055,12 +3275,12 @@
         </p:nvSpPr>
         <p:spPr>
           <a:xfrm>
-            <a:off x="7493508" y="3533790"/>
-            <a:ext cx="191110" cy="198059"/>
+            <a:off x="6803136" y="4041648"/>
+            <a:ext cx="166787" cy="178308"/>
           </a:xfrm>
           <a:prstGeom prst="roundRect">
             <a:avLst>
-              <a:gd name="adj" fmla="val 23923"/>
+              <a:gd name="adj" fmla="val 27412"/>
             </a:avLst>
           </a:prstGeom>
           <a:solidFill>
@@ -3084,8 +3304,8 @@
         </p:nvSpPr>
         <p:spPr>
           <a:xfrm>
-            <a:off x="7765085" y="3539002"/>
-            <a:ext cx="1307592" cy="187635"/>
+            <a:off x="7048927" y="4029761"/>
+            <a:ext cx="1228954" cy="202082"/>
           </a:xfrm>
           <a:prstGeom prst="rect">
             <a:avLst/>
@@ -3099,12 +3319,12 @@
           <a:p>
             <a:pPr algn="l" indent="0" marL="0">
               <a:lnSpc>
-                <a:spcPct val="115000"/>
-              </a:lnSpc>
-              <a:buNone/>
-            </a:pPr>
-            <a:r>
-              <a:rPr lang="en-US" sz="750" dirty="0">
+                <a:spcPct val="120000"/>
+              </a:lnSpc>
+              <a:buNone/>
+            </a:pPr>
+            <a:r>
+              <a:rPr lang="en-US" sz="950" dirty="0">
                 <a:solidFill>
                   <a:srgbClr val="5B6570"/>
                 </a:solidFill>
@@ -3114,7 +3334,7 @@
               </a:rPr>
               <a:t>reef fish (1)</a:t>
             </a:r>
-            <a:endParaRPr lang="en-US" sz="750" dirty="0"/>
+            <a:endParaRPr lang="en-US" sz="950" dirty="0"/>
           </a:p>
         </p:txBody>
       </p:sp>
@@ -3126,8 +3346,8 @@
         </p:nvSpPr>
         <p:spPr>
           <a:xfrm>
-            <a:off x="247802" y="4159606"/>
-            <a:ext cx="228600" cy="228600"/>
+            <a:off x="227686" y="4750308"/>
+            <a:ext cx="246888" cy="246888"/>
           </a:xfrm>
           <a:prstGeom prst="ellipse">
             <a:avLst/>
@@ -3151,27 +3371,27 @@
         </p:nvSpPr>
         <p:spPr>
           <a:xfrm>
-            <a:off x="60350" y="4148816"/>
-            <a:ext cx="603504" cy="250180"/>
-          </a:xfrm>
-          <a:prstGeom prst="rect">
-            <a:avLst/>
-          </a:prstGeom>
-          <a:noFill/>
-          <a:ln/>
-        </p:spPr>
-        <p:txBody>
-          <a:bodyPr wrap="square" lIns="0" tIns="0" rIns="0" bIns="0" rtlCol="0" anchor="ctr"/>
-          <a:lstStyle/>
-          <a:p>
-            <a:pPr algn="ctr" indent="0" marL="0">
-              <a:lnSpc>
-                <a:spcPct val="115000"/>
-              </a:lnSpc>
-              <a:buNone/>
-            </a:pPr>
-            <a:r>
-              <a:rPr lang="en-US" sz="900" b="1" dirty="0">
+            <a:off x="87782" y="4742993"/>
+            <a:ext cx="526694" cy="261518"/>
+          </a:xfrm>
+          <a:prstGeom prst="rect">
+            <a:avLst/>
+          </a:prstGeom>
+          <a:noFill/>
+          <a:ln/>
+        </p:spPr>
+        <p:txBody>
+          <a:bodyPr wrap="square" lIns="0" tIns="0" rIns="0" bIns="0" rtlCol="0" anchor="ctr"/>
+          <a:lstStyle/>
+          <a:p>
+            <a:pPr algn="ctr" indent="0" marL="0">
+              <a:lnSpc>
+                <a:spcPct val="120000"/>
+              </a:lnSpc>
+              <a:buNone/>
+            </a:pPr>
+            <a:r>
+              <a:rPr lang="en-US" sz="1100" b="1" dirty="0">
                 <a:solidFill>
                   <a:srgbClr val="FFFFFF"/>
                 </a:solidFill>
@@ -3181,7 +3401,7 @@
               </a:rPr>
               <a:t>2</a:t>
             </a:r>
-            <a:endParaRPr lang="en-US" sz="900" dirty="0"/>
+            <a:endParaRPr lang="en-US" sz="1100" dirty="0"/>
           </a:p>
         </p:txBody>
       </p:sp>
@@ -3193,8 +3413,8 @@
         </p:nvSpPr>
         <p:spPr>
           <a:xfrm>
-            <a:off x="724205" y="4107119"/>
-            <a:ext cx="8046720" cy="333573"/>
+            <a:off x="702259" y="4719218"/>
+            <a:ext cx="7198157" cy="309067"/>
           </a:xfrm>
           <a:prstGeom prst="rect">
             <a:avLst/>
@@ -3208,12 +3428,12 @@
           <a:p>
             <a:pPr algn="l" indent="0" marL="0">
               <a:lnSpc>
-                <a:spcPct val="115000"/>
-              </a:lnSpc>
-              <a:buNone/>
-            </a:pPr>
-            <a:r>
-              <a:rPr lang="en-US" sz="1150" b="1" dirty="0">
+                <a:spcPct val="120000"/>
+              </a:lnSpc>
+              <a:buNone/>
+            </a:pPr>
+            <a:r>
+              <a:rPr lang="en-US" sz="1450" b="1" dirty="0">
                 <a:solidFill>
                   <a:srgbClr val="1F2D3A"/>
                 </a:solidFill>
@@ -3223,7 +3443,7 @@
               </a:rPr>
               <a:t>A reference value for each task</a:t>
             </a:r>
-            <a:endParaRPr lang="en-US" sz="1150" dirty="0"/>
+            <a:endParaRPr lang="en-US" sz="1450" dirty="0"/>
           </a:p>
         </p:txBody>
       </p:sp>
@@ -3235,8 +3455,8 @@
         </p:nvSpPr>
         <p:spPr>
           <a:xfrm>
-            <a:off x="724205" y="4409420"/>
-            <a:ext cx="8549640" cy="271028"/>
+            <a:off x="702259" y="5052060"/>
+            <a:ext cx="7724851" cy="285293"/>
           </a:xfrm>
           <a:prstGeom prst="rect">
             <a:avLst/>
@@ -3250,12 +3470,12 @@
           <a:p>
             <a:pPr algn="l" indent="0" marL="0">
               <a:lnSpc>
-                <a:spcPct val="115000"/>
-              </a:lnSpc>
-              <a:buNone/>
-            </a:pPr>
-            <a:r>
-              <a:rPr lang="en-US" sz="860" dirty="0">
+                <a:spcPct val="120000"/>
+              </a:lnSpc>
+              <a:buNone/>
+            </a:pPr>
+            <a:r>
+              <a:rPr lang="en-US" sz="1100" dirty="0">
                 <a:solidFill>
                   <a:srgbClr val="5B6570"/>
                 </a:solidFill>
@@ -3265,7 +3485,7 @@
               </a:rPr>
               <a:t>so that a number returned by a run can be judged right or wrong</a:t>
             </a:r>
-            <a:endParaRPr lang="en-US" sz="860" dirty="0"/>
+            <a:endParaRPr lang="en-US" sz="1100" dirty="0"/>
           </a:p>
         </p:txBody>
       </p:sp>
@@ -3277,12 +3497,12 @@
         </p:nvSpPr>
         <p:spPr>
           <a:xfrm>
-            <a:off x="2715768" y="4711720"/>
-            <a:ext cx="1860804" cy="708843"/>
+            <a:off x="2545690" y="5468112"/>
+            <a:ext cx="1492301" cy="713232"/>
           </a:xfrm>
           <a:prstGeom prst="roundRect">
             <a:avLst>
-              <a:gd name="adj" fmla="val 10320"/>
+              <a:gd name="adj" fmla="val 10256"/>
             </a:avLst>
           </a:prstGeom>
           <a:solidFill>
@@ -3304,27 +3524,27 @@
         </p:nvSpPr>
         <p:spPr>
           <a:xfrm>
-            <a:off x="2791206" y="4888931"/>
-            <a:ext cx="1709928" cy="354421"/>
-          </a:xfrm>
-          <a:prstGeom prst="rect">
-            <a:avLst/>
-          </a:prstGeom>
-          <a:noFill/>
-          <a:ln/>
-        </p:spPr>
-        <p:txBody>
-          <a:bodyPr wrap="square" lIns="0" tIns="0" rIns="0" bIns="0" rtlCol="0" anchor="ctr"/>
-          <a:lstStyle/>
-          <a:p>
-            <a:pPr algn="ctr" indent="0" marL="0">
-              <a:lnSpc>
-                <a:spcPct val="115000"/>
-              </a:lnSpc>
-              <a:buNone/>
-            </a:pPr>
-            <a:r>
-              <a:rPr lang="en-US" sz="830" dirty="0">
+            <a:off x="2589581" y="5634533"/>
+            <a:ext cx="1404518" cy="380390"/>
+          </a:xfrm>
+          <a:prstGeom prst="rect">
+            <a:avLst/>
+          </a:prstGeom>
+          <a:noFill/>
+          <a:ln/>
+        </p:spPr>
+        <p:txBody>
+          <a:bodyPr wrap="square" lIns="0" tIns="0" rIns="0" bIns="0" rtlCol="0" anchor="ctr"/>
+          <a:lstStyle/>
+          <a:p>
+            <a:pPr algn="ctr" indent="0" marL="0">
+              <a:lnSpc>
+                <a:spcPct val="120000"/>
+              </a:lnSpc>
+              <a:buNone/>
+            </a:pPr>
+            <a:r>
+              <a:rPr lang="en-US" sz="1050" dirty="0">
                 <a:solidFill>
                   <a:srgbClr val="1F2D3A"/>
                 </a:solidFill>
@@ -3334,17 +3554,17 @@
               </a:rPr>
               <a:t>the quantity</a:t>
             </a:r>
-            <a:endParaRPr lang="en-US" sz="830" dirty="0"/>
-          </a:p>
-          <a:p>
-            <a:pPr algn="ctr" indent="0" marL="0">
-              <a:lnSpc>
-                <a:spcPct val="115000"/>
-              </a:lnSpc>
-              <a:buNone/>
-            </a:pPr>
-            <a:r>
-              <a:rPr lang="en-US" sz="830" dirty="0">
+            <a:endParaRPr lang="en-US" sz="1050" dirty="0"/>
+          </a:p>
+          <a:p>
+            <a:pPr algn="ctr" indent="0" marL="0">
+              <a:lnSpc>
+                <a:spcPct val="120000"/>
+              </a:lnSpc>
+              <a:buNone/>
+            </a:pPr>
+            <a:r>
+              <a:rPr lang="en-US" sz="1050" dirty="0">
                 <a:solidFill>
                   <a:srgbClr val="1F2D3A"/>
                 </a:solidFill>
@@ -3354,7 +3574,7 @@
               </a:rPr>
               <a:t>stated in words</a:t>
             </a:r>
-            <a:endParaRPr lang="en-US" sz="830" dirty="0"/>
+            <a:endParaRPr lang="en-US" sz="1050" dirty="0"/>
           </a:p>
         </p:txBody>
       </p:sp>
@@ -3366,8 +3586,8 @@
         </p:nvSpPr>
         <p:spPr>
           <a:xfrm>
-            <a:off x="4646981" y="5066142"/>
-            <a:ext cx="412394" cy="0"/>
+            <a:off x="4108216" y="5824728"/>
+            <a:ext cx="210678" cy="0"/>
           </a:xfrm>
           <a:prstGeom prst="line">
             <a:avLst/>
@@ -3390,18 +3610,18 @@
         </p:nvSpPr>
         <p:spPr>
           <a:xfrm>
-            <a:off x="5129784" y="4711720"/>
-            <a:ext cx="2061972" cy="302301"/>
+            <a:off x="4389120" y="5468112"/>
+            <a:ext cx="2062886" cy="309067"/>
           </a:xfrm>
           <a:prstGeom prst="roundRect">
             <a:avLst>
-              <a:gd name="adj" fmla="val 21174"/>
+              <a:gd name="adj" fmla="val 20710"/>
             </a:avLst>
           </a:prstGeom>
           <a:solidFill>
             <a:srgbClr val="FFFFFF"/>
           </a:solidFill>
-          <a:ln w="13970">
+          <a:ln w="15240">
             <a:solidFill>
               <a:srgbClr val="009E73"/>
             </a:solidFill>
@@ -3417,27 +3637,27 @@
         </p:nvSpPr>
         <p:spPr>
           <a:xfrm>
-            <a:off x="5180076" y="4737781"/>
-            <a:ext cx="1961388" cy="250180"/>
-          </a:xfrm>
-          <a:prstGeom prst="rect">
-            <a:avLst/>
-          </a:prstGeom>
-          <a:noFill/>
-          <a:ln/>
-        </p:spPr>
-        <p:txBody>
-          <a:bodyPr wrap="square" lIns="0" tIns="0" rIns="0" bIns="0" rtlCol="0" anchor="ctr"/>
-          <a:lstStyle/>
-          <a:p>
-            <a:pPr algn="ctr" indent="0" marL="0">
-              <a:lnSpc>
-                <a:spcPct val="115000"/>
-              </a:lnSpc>
-              <a:buNone/>
-            </a:pPr>
-            <a:r>
-              <a:rPr lang="en-US" sz="770" dirty="0">
+            <a:off x="4411066" y="5491886"/>
+            <a:ext cx="2018995" cy="261518"/>
+          </a:xfrm>
+          <a:prstGeom prst="rect">
+            <a:avLst/>
+          </a:prstGeom>
+          <a:noFill/>
+          <a:ln/>
+        </p:spPr>
+        <p:txBody>
+          <a:bodyPr wrap="square" lIns="0" tIns="0" rIns="0" bIns="0" rtlCol="0" anchor="ctr"/>
+          <a:lstStyle/>
+          <a:p>
+            <a:pPr algn="ctr" indent="0" marL="0">
+              <a:lnSpc>
+                <a:spcPct val="120000"/>
+              </a:lnSpc>
+              <a:buNone/>
+            </a:pPr>
+            <a:r>
+              <a:rPr lang="en-US" sz="980" dirty="0">
                 <a:solidFill>
                   <a:srgbClr val="009E73"/>
                 </a:solidFill>
@@ -3447,7 +3667,7 @@
               </a:rPr>
               <a:t>implementation using a library</a:t>
             </a:r>
-            <a:endParaRPr lang="en-US" sz="770" dirty="0"/>
+            <a:endParaRPr lang="en-US" sz="980" dirty="0"/>
           </a:p>
         </p:txBody>
       </p:sp>
@@ -3459,18 +3679,18 @@
         </p:nvSpPr>
         <p:spPr>
           <a:xfrm>
-            <a:off x="5129784" y="5118263"/>
-            <a:ext cx="2061972" cy="302301"/>
+            <a:off x="4389120" y="5872277"/>
+            <a:ext cx="2062886" cy="309067"/>
           </a:xfrm>
           <a:prstGeom prst="roundRect">
             <a:avLst>
-              <a:gd name="adj" fmla="val 21174"/>
+              <a:gd name="adj" fmla="val 20710"/>
             </a:avLst>
           </a:prstGeom>
           <a:solidFill>
             <a:srgbClr val="FFFFFF"/>
           </a:solidFill>
-          <a:ln w="13970">
+          <a:ln w="15240">
             <a:solidFill>
               <a:srgbClr val="009E73"/>
             </a:solidFill>
@@ -3486,27 +3706,27 @@
         </p:nvSpPr>
         <p:spPr>
           <a:xfrm>
-            <a:off x="5180076" y="5144323"/>
-            <a:ext cx="1961388" cy="250180"/>
-          </a:xfrm>
-          <a:prstGeom prst="rect">
-            <a:avLst/>
-          </a:prstGeom>
-          <a:noFill/>
-          <a:ln/>
-        </p:spPr>
-        <p:txBody>
-          <a:bodyPr wrap="square" lIns="0" tIns="0" rIns="0" bIns="0" rtlCol="0" anchor="ctr"/>
-          <a:lstStyle/>
-          <a:p>
-            <a:pPr algn="ctr" indent="0" marL="0">
-              <a:lnSpc>
-                <a:spcPct val="115000"/>
-              </a:lnSpc>
-              <a:buNone/>
-            </a:pPr>
-            <a:r>
-              <a:rPr lang="en-US" sz="770" dirty="0">
+            <a:off x="4411066" y="5896051"/>
+            <a:ext cx="2018995" cy="261518"/>
+          </a:xfrm>
+          <a:prstGeom prst="rect">
+            <a:avLst/>
+          </a:prstGeom>
+          <a:noFill/>
+          <a:ln/>
+        </p:spPr>
+        <p:txBody>
+          <a:bodyPr wrap="square" lIns="0" tIns="0" rIns="0" bIns="0" rtlCol="0" anchor="ctr"/>
+          <a:lstStyle/>
+          <a:p>
+            <a:pPr algn="ctr" indent="0" marL="0">
+              <a:lnSpc>
+                <a:spcPct val="120000"/>
+              </a:lnSpc>
+              <a:buNone/>
+            </a:pPr>
+            <a:r>
+              <a:rPr lang="en-US" sz="980" dirty="0">
                 <a:solidFill>
                   <a:srgbClr val="009E73"/>
                 </a:solidFill>
@@ -3516,7 +3736,7 @@
               </a:rPr>
               <a:t>implementation as a direct loop</a:t>
             </a:r>
-            <a:endParaRPr lang="en-US" sz="770" dirty="0"/>
+            <a:endParaRPr lang="en-US" sz="980" dirty="0"/>
           </a:p>
         </p:txBody>
       </p:sp>
@@ -3528,8 +3748,8 @@
         </p:nvSpPr>
         <p:spPr>
           <a:xfrm>
-            <a:off x="7262165" y="5066142"/>
-            <a:ext cx="412394" cy="0"/>
+            <a:off x="6522232" y="5824728"/>
+            <a:ext cx="210678" cy="0"/>
           </a:xfrm>
           <a:prstGeom prst="line">
             <a:avLst/>
@@ -3552,18 +3772,18 @@
         </p:nvSpPr>
         <p:spPr>
           <a:xfrm>
-            <a:off x="7744968" y="4711720"/>
-            <a:ext cx="1709928" cy="708843"/>
+            <a:off x="6803136" y="5468112"/>
+            <a:ext cx="1536192" cy="713232"/>
           </a:xfrm>
           <a:prstGeom prst="roundRect">
             <a:avLst>
-              <a:gd name="adj" fmla="val 10320"/>
+              <a:gd name="adj" fmla="val 10256"/>
             </a:avLst>
           </a:prstGeom>
           <a:solidFill>
             <a:srgbClr val="FFFFFF"/>
           </a:solidFill>
-          <a:ln w="19050">
+          <a:ln w="20320">
             <a:solidFill>
               <a:srgbClr val="009E73"/>
             </a:solidFill>
@@ -3579,27 +3799,27 @@
         </p:nvSpPr>
         <p:spPr>
           <a:xfrm>
-            <a:off x="7795260" y="4836810"/>
-            <a:ext cx="1609344" cy="229332"/>
-          </a:xfrm>
-          <a:prstGeom prst="rect">
-            <a:avLst/>
-          </a:prstGeom>
-          <a:noFill/>
-          <a:ln/>
-        </p:spPr>
-        <p:txBody>
-          <a:bodyPr wrap="square" lIns="0" tIns="0" rIns="0" bIns="0" rtlCol="0" anchor="ctr"/>
-          <a:lstStyle/>
-          <a:p>
-            <a:pPr algn="ctr" indent="0" marL="0">
-              <a:lnSpc>
-                <a:spcPct val="115000"/>
-              </a:lnSpc>
-              <a:buNone/>
-            </a:pPr>
-            <a:r>
-              <a:rPr lang="en-US" sz="840" b="1" dirty="0">
+            <a:off x="6825082" y="5575097"/>
+            <a:ext cx="1492301" cy="237744"/>
+          </a:xfrm>
+          <a:prstGeom prst="rect">
+            <a:avLst/>
+          </a:prstGeom>
+          <a:noFill/>
+          <a:ln/>
+        </p:spPr>
+        <p:txBody>
+          <a:bodyPr wrap="square" lIns="0" tIns="0" rIns="0" bIns="0" rtlCol="0" anchor="ctr"/>
+          <a:lstStyle/>
+          <a:p>
+            <a:pPr algn="ctr" indent="0" marL="0">
+              <a:lnSpc>
+                <a:spcPct val="120000"/>
+              </a:lnSpc>
+              <a:buNone/>
+            </a:pPr>
+            <a:r>
+              <a:rPr lang="en-US" sz="1050" b="1" dirty="0">
                 <a:solidFill>
                   <a:srgbClr val="009E73"/>
                 </a:solidFill>
@@ -3609,7 +3829,7 @@
               </a:rPr>
               <a:t>accepted only</a:t>
             </a:r>
-            <a:endParaRPr lang="en-US" sz="840" dirty="0"/>
+            <a:endParaRPr lang="en-US" sz="1050" dirty="0"/>
           </a:p>
         </p:txBody>
       </p:sp>
@@ -3621,27 +3841,27 @@
         </p:nvSpPr>
         <p:spPr>
           <a:xfrm>
-            <a:off x="7795260" y="5076566"/>
-            <a:ext cx="1609344" cy="229332"/>
-          </a:xfrm>
-          <a:prstGeom prst="rect">
-            <a:avLst/>
-          </a:prstGeom>
-          <a:noFill/>
-          <a:ln/>
-        </p:spPr>
-        <p:txBody>
-          <a:bodyPr wrap="square" lIns="0" tIns="0" rIns="0" bIns="0" rtlCol="0" anchor="ctr"/>
-          <a:lstStyle/>
-          <a:p>
-            <a:pPr algn="ctr" indent="0" marL="0">
-              <a:lnSpc>
-                <a:spcPct val="115000"/>
-              </a:lnSpc>
-              <a:buNone/>
-            </a:pPr>
-            <a:r>
-              <a:rPr lang="en-US" sz="840" dirty="0">
+            <a:off x="6825082" y="5836615"/>
+            <a:ext cx="1492301" cy="237744"/>
+          </a:xfrm>
+          <a:prstGeom prst="rect">
+            <a:avLst/>
+          </a:prstGeom>
+          <a:noFill/>
+          <a:ln/>
+        </p:spPr>
+        <p:txBody>
+          <a:bodyPr wrap="square" lIns="0" tIns="0" rIns="0" bIns="0" rtlCol="0" anchor="ctr"/>
+          <a:lstStyle/>
+          <a:p>
+            <a:pPr algn="ctr" indent="0" marL="0">
+              <a:lnSpc>
+                <a:spcPct val="120000"/>
+              </a:lnSpc>
+              <a:buNone/>
+            </a:pPr>
+            <a:r>
+              <a:rPr lang="en-US" sz="1050" dirty="0">
                 <a:solidFill>
                   <a:srgbClr val="009E73"/>
                 </a:solidFill>
@@ -3651,7 +3871,7 @@
               </a:rPr>
               <a:t>where the two agree</a:t>
             </a:r>
-            <a:endParaRPr lang="en-US" sz="840" dirty="0"/>
+            <a:endParaRPr lang="en-US" sz="1050" dirty="0"/>
           </a:p>
         </p:txBody>
       </p:sp>
@@ -3663,27 +3883,27 @@
         </p:nvSpPr>
         <p:spPr>
           <a:xfrm>
-            <a:off x="3143250" y="5535229"/>
-            <a:ext cx="6035040" cy="229332"/>
-          </a:xfrm>
-          <a:prstGeom prst="rect">
-            <a:avLst/>
-          </a:prstGeom>
-          <a:noFill/>
-          <a:ln/>
-        </p:spPr>
-        <p:txBody>
-          <a:bodyPr wrap="square" lIns="0" tIns="0" rIns="0" bIns="0" rtlCol="0" anchor="ctr"/>
-          <a:lstStyle/>
-          <a:p>
-            <a:pPr algn="ctr" indent="0" marL="0">
-              <a:lnSpc>
-                <a:spcPct val="115000"/>
-              </a:lnSpc>
-              <a:buNone/>
-            </a:pPr>
-            <a:r>
-              <a:rPr lang="en-US" sz="750" i="1" dirty="0">
+            <a:off x="2721254" y="6335878"/>
+            <a:ext cx="5442509" cy="237744"/>
+          </a:xfrm>
+          <a:prstGeom prst="rect">
+            <a:avLst/>
+          </a:prstGeom>
+          <a:noFill/>
+          <a:ln/>
+        </p:spPr>
+        <p:txBody>
+          <a:bodyPr wrap="square" lIns="0" tIns="0" rIns="0" bIns="0" rtlCol="0" anchor="ctr"/>
+          <a:lstStyle/>
+          <a:p>
+            <a:pPr algn="ctr" indent="0" marL="0">
+              <a:lnSpc>
+                <a:spcPct val="120000"/>
+              </a:lnSpc>
+              <a:buNone/>
+            </a:pPr>
+            <a:r>
+              <a:rPr lang="en-US" sz="950" i="1" dirty="0">
                 <a:solidFill>
                   <a:srgbClr val="5B6570"/>
                 </a:solidFill>
@@ -3693,7 +3913,7 @@
               </a:rPr>
               <a:t>the two implementations were written independently of one another</a:t>
             </a:r>
-            <a:endParaRPr lang="en-US" sz="750" dirty="0"/>
+            <a:endParaRPr lang="en-US" sz="950" dirty="0"/>
           </a:p>
         </p:txBody>
       </p:sp>
@@ -3705,8 +3925,8 @@
         </p:nvSpPr>
         <p:spPr>
           <a:xfrm>
-            <a:off x="247802" y="6140196"/>
-            <a:ext cx="228600" cy="228600"/>
+            <a:off x="227686" y="7068312"/>
+            <a:ext cx="246888" cy="246888"/>
           </a:xfrm>
           <a:prstGeom prst="ellipse">
             <a:avLst/>
@@ -3730,27 +3950,27 @@
         </p:nvSpPr>
         <p:spPr>
           <a:xfrm>
-            <a:off x="60350" y="6129406"/>
-            <a:ext cx="603504" cy="250180"/>
-          </a:xfrm>
-          <a:prstGeom prst="rect">
-            <a:avLst/>
-          </a:prstGeom>
-          <a:noFill/>
-          <a:ln/>
-        </p:spPr>
-        <p:txBody>
-          <a:bodyPr wrap="square" lIns="0" tIns="0" rIns="0" bIns="0" rtlCol="0" anchor="ctr"/>
-          <a:lstStyle/>
-          <a:p>
-            <a:pPr algn="ctr" indent="0" marL="0">
-              <a:lnSpc>
-                <a:spcPct val="115000"/>
-              </a:lnSpc>
-              <a:buNone/>
-            </a:pPr>
-            <a:r>
-              <a:rPr lang="en-US" sz="900" b="1" dirty="0">
+            <a:off x="87782" y="7060997"/>
+            <a:ext cx="526694" cy="261518"/>
+          </a:xfrm>
+          <a:prstGeom prst="rect">
+            <a:avLst/>
+          </a:prstGeom>
+          <a:noFill/>
+          <a:ln/>
+        </p:spPr>
+        <p:txBody>
+          <a:bodyPr wrap="square" lIns="0" tIns="0" rIns="0" bIns="0" rtlCol="0" anchor="ctr"/>
+          <a:lstStyle/>
+          <a:p>
+            <a:pPr algn="ctr" indent="0" marL="0">
+              <a:lnSpc>
+                <a:spcPct val="120000"/>
+              </a:lnSpc>
+              <a:buNone/>
+            </a:pPr>
+            <a:r>
+              <a:rPr lang="en-US" sz="1100" b="1" dirty="0">
                 <a:solidFill>
                   <a:srgbClr val="FFFFFF"/>
                 </a:solidFill>
@@ -3760,7 +3980,7 @@
               </a:rPr>
               <a:t>3</a:t>
             </a:r>
-            <a:endParaRPr lang="en-US" sz="900" dirty="0"/>
+            <a:endParaRPr lang="en-US" sz="1100" dirty="0"/>
           </a:p>
         </p:txBody>
       </p:sp>
@@ -3772,8 +3992,8 @@
         </p:nvSpPr>
         <p:spPr>
           <a:xfrm>
-            <a:off x="724205" y="6087709"/>
-            <a:ext cx="8046720" cy="333573"/>
+            <a:off x="702259" y="7037222"/>
+            <a:ext cx="7198157" cy="309067"/>
           </a:xfrm>
           <a:prstGeom prst="rect">
             <a:avLst/>
@@ -3787,12 +4007,12 @@
           <a:p>
             <a:pPr algn="l" indent="0" marL="0">
               <a:lnSpc>
-                <a:spcPct val="115000"/>
-              </a:lnSpc>
-              <a:buNone/>
-            </a:pPr>
-            <a:r>
-              <a:rPr lang="en-US" sz="1150" b="1" dirty="0">
+                <a:spcPct val="120000"/>
+              </a:lnSpc>
+              <a:buNone/>
+            </a:pPr>
+            <a:r>
+              <a:rPr lang="en-US" sz="1450" b="1" dirty="0">
                 <a:solidFill>
                   <a:srgbClr val="1F2D3A"/>
                 </a:solidFill>
@@ -3802,7 +4022,7 @@
               </a:rPr>
               <a:t>Every task presented under three conditions</a:t>
             </a:r>
-            <a:endParaRPr lang="en-US" sz="1150" dirty="0"/>
+            <a:endParaRPr lang="en-US" sz="1450" dirty="0"/>
           </a:p>
         </p:txBody>
       </p:sp>
@@ -3814,8 +4034,8 @@
         </p:nvSpPr>
         <p:spPr>
           <a:xfrm>
-            <a:off x="724205" y="6390010"/>
-            <a:ext cx="8549640" cy="271028"/>
+            <a:off x="702259" y="7370064"/>
+            <a:ext cx="7724851" cy="285293"/>
           </a:xfrm>
           <a:prstGeom prst="rect">
             <a:avLst/>
@@ -3829,12 +4049,12 @@
           <a:p>
             <a:pPr algn="l" indent="0" marL="0">
               <a:lnSpc>
-                <a:spcPct val="115000"/>
-              </a:lnSpc>
-              <a:buNone/>
-            </a:pPr>
-            <a:r>
-              <a:rPr lang="en-US" sz="860" dirty="0">
+                <a:spcPct val="120000"/>
+              </a:lnSpc>
+              <a:buNone/>
+            </a:pPr>
+            <a:r>
+              <a:rPr lang="en-US" sz="1100" dirty="0">
                 <a:solidFill>
                   <a:srgbClr val="5B6570"/>
                 </a:solidFill>
@@ -3844,7 +4064,7 @@
               </a:rPr>
               <a:t>the second gives the standing recommendation to share code a fair trial</a:t>
             </a:r>
-            <a:endParaRPr lang="en-US" sz="860" dirty="0"/>
+            <a:endParaRPr lang="en-US" sz="1100" dirty="0"/>
           </a:p>
         </p:txBody>
       </p:sp>
@@ -3856,18 +4076,18 @@
         </p:nvSpPr>
         <p:spPr>
           <a:xfrm>
-            <a:off x="2715768" y="6692311"/>
-            <a:ext cx="2112264" cy="1104961"/>
+            <a:off x="2545690" y="7726680"/>
+            <a:ext cx="1887322" cy="1188720"/>
           </a:xfrm>
           <a:prstGeom prst="roundRect">
             <a:avLst>
-              <a:gd name="adj" fmla="val 6620"/>
+              <a:gd name="adj" fmla="val 6154"/>
             </a:avLst>
           </a:prstGeom>
           <a:solidFill>
             <a:srgbClr val="FFFFFF"/>
           </a:solidFill>
-          <a:ln w="19050">
+          <a:ln w="20320">
             <a:solidFill>
               <a:srgbClr val="D55E00"/>
             </a:solidFill>
@@ -3883,12 +4103,12 @@
         </p:nvSpPr>
         <p:spPr>
           <a:xfrm>
-            <a:off x="2715768" y="6692311"/>
-            <a:ext cx="2112264" cy="271028"/>
+            <a:off x="2545690" y="7726680"/>
+            <a:ext cx="1887322" cy="285293"/>
           </a:xfrm>
           <a:prstGeom prst="roundRect">
             <a:avLst>
-              <a:gd name="adj" fmla="val 26991"/>
+              <a:gd name="adj" fmla="val 25641"/>
             </a:avLst>
           </a:prstGeom>
           <a:solidFill>
@@ -3896,7 +4116,7 @@
               <a:alpha val="15000"/>
             </a:srgbClr>
           </a:solidFill>
-          <a:ln w="19050">
+          <a:ln w="20320">
             <a:solidFill>
               <a:srgbClr val="D55E00"/>
             </a:solidFill>
@@ -3912,27 +4132,27 @@
         </p:nvSpPr>
         <p:spPr>
           <a:xfrm>
-            <a:off x="2766060" y="6713159"/>
-            <a:ext cx="2011680" cy="229332"/>
-          </a:xfrm>
-          <a:prstGeom prst="rect">
-            <a:avLst/>
-          </a:prstGeom>
-          <a:noFill/>
-          <a:ln/>
-        </p:spPr>
-        <p:txBody>
-          <a:bodyPr wrap="square" lIns="0" tIns="0" rIns="0" bIns="0" rtlCol="0" anchor="ctr"/>
-          <a:lstStyle/>
-          <a:p>
-            <a:pPr algn="ctr" indent="0" marL="0">
-              <a:lnSpc>
-                <a:spcPct val="115000"/>
-              </a:lnSpc>
-              <a:buNone/>
-            </a:pPr>
-            <a:r>
-              <a:rPr lang="en-US" sz="900" b="1" dirty="0">
+            <a:off x="2589581" y="7750454"/>
+            <a:ext cx="1799539" cy="237744"/>
+          </a:xfrm>
+          <a:prstGeom prst="rect">
+            <a:avLst/>
+          </a:prstGeom>
+          <a:noFill/>
+          <a:ln/>
+        </p:spPr>
+        <p:txBody>
+          <a:bodyPr wrap="square" lIns="0" tIns="0" rIns="0" bIns="0" rtlCol="0" anchor="ctr"/>
+          <a:lstStyle/>
+          <a:p>
+            <a:pPr algn="ctr" indent="0" marL="0">
+              <a:lnSpc>
+                <a:spcPct val="120000"/>
+              </a:lnSpc>
+              <a:buNone/>
+            </a:pPr>
+            <a:r>
+              <a:rPr lang="en-US" sz="1150" b="1" dirty="0">
                 <a:solidFill>
                   <a:srgbClr val="D55E00"/>
                 </a:solidFill>
@@ -3942,7 +4162,7 @@
               </a:rPr>
               <a:t>Question alone</a:t>
             </a:r>
-            <a:endParaRPr lang="en-US" sz="900" dirty="0"/>
+            <a:endParaRPr lang="en-US" sz="1150" dirty="0"/>
           </a:p>
         </p:txBody>
       </p:sp>
@@ -3954,27 +4174,27 @@
         </p:nvSpPr>
         <p:spPr>
           <a:xfrm>
-            <a:off x="2791206" y="7093641"/>
-            <a:ext cx="1961388" cy="573329"/>
-          </a:xfrm>
-          <a:prstGeom prst="rect">
-            <a:avLst/>
-          </a:prstGeom>
-          <a:noFill/>
-          <a:ln/>
-        </p:spPr>
-        <p:txBody>
-          <a:bodyPr wrap="square" lIns="0" tIns="0" rIns="0" bIns="0" rtlCol="0" anchor="ctr"/>
-          <a:lstStyle/>
-          <a:p>
-            <a:pPr algn="ctr" indent="0" marL="0">
-              <a:lnSpc>
-                <a:spcPct val="115000"/>
-              </a:lnSpc>
-              <a:buNone/>
-            </a:pPr>
-            <a:r>
-              <a:rPr lang="en-US" sz="770" dirty="0">
+            <a:off x="2611526" y="8130845"/>
+            <a:ext cx="1755648" cy="665683"/>
+          </a:xfrm>
+          <a:prstGeom prst="rect">
+            <a:avLst/>
+          </a:prstGeom>
+          <a:noFill/>
+          <a:ln/>
+        </p:spPr>
+        <p:txBody>
+          <a:bodyPr wrap="square" lIns="0" tIns="0" rIns="0" bIns="0" rtlCol="0" anchor="ctr"/>
+          <a:lstStyle/>
+          <a:p>
+            <a:pPr algn="ctr" indent="0" marL="0">
+              <a:lnSpc>
+                <a:spcPct val="120000"/>
+              </a:lnSpc>
+              <a:buNone/>
+            </a:pPr>
+            <a:r>
+              <a:rPr lang="en-US" sz="1000" dirty="0">
                 <a:solidFill>
                   <a:srgbClr val="1F2D3A"/>
                 </a:solidFill>
@@ -3984,17 +4204,17 @@
               </a:rPr>
               <a:t>the question, the column</a:t>
             </a:r>
-            <a:endParaRPr lang="en-US" sz="770" dirty="0"/>
-          </a:p>
-          <a:p>
-            <a:pPr algn="ctr" indent="0" marL="0">
-              <a:lnSpc>
-                <a:spcPct val="115000"/>
-              </a:lnSpc>
-              <a:buNone/>
-            </a:pPr>
-            <a:r>
-              <a:rPr lang="en-US" sz="770" dirty="0">
+            <a:endParaRPr lang="en-US" sz="1000" dirty="0"/>
+          </a:p>
+          <a:p>
+            <a:pPr algn="ctr" indent="0" marL="0">
+              <a:lnSpc>
+                <a:spcPct val="120000"/>
+              </a:lnSpc>
+              <a:buNone/>
+            </a:pPr>
+            <a:r>
+              <a:rPr lang="en-US" sz="1000" dirty="0">
                 <a:solidFill>
                   <a:srgbClr val="1F2D3A"/>
                 </a:solidFill>
@@ -4004,7 +4224,7 @@
               </a:rPr>
               <a:t>names and the first rows</a:t>
             </a:r>
-            <a:endParaRPr lang="en-US" sz="770" dirty="0"/>
+            <a:endParaRPr lang="en-US" sz="1000" dirty="0"/>
           </a:p>
         </p:txBody>
       </p:sp>
@@ -4016,18 +4236,18 @@
         </p:nvSpPr>
         <p:spPr>
           <a:xfrm>
-            <a:off x="4978908" y="6692311"/>
-            <a:ext cx="2112264" cy="1104961"/>
+            <a:off x="4520794" y="7726680"/>
+            <a:ext cx="1887322" cy="1188720"/>
           </a:xfrm>
           <a:prstGeom prst="roundRect">
             <a:avLst>
-              <a:gd name="adj" fmla="val 6620"/>
+              <a:gd name="adj" fmla="val 6154"/>
             </a:avLst>
           </a:prstGeom>
           <a:solidFill>
             <a:srgbClr val="FFFFFF"/>
           </a:solidFill>
-          <a:ln w="19050">
+          <a:ln w="20320">
             <a:solidFill>
               <a:srgbClr val="CC79A7"/>
             </a:solidFill>
@@ -4043,12 +4263,12 @@
         </p:nvSpPr>
         <p:spPr>
           <a:xfrm>
-            <a:off x="4978908" y="6692311"/>
-            <a:ext cx="2112264" cy="271028"/>
+            <a:off x="4520794" y="7726680"/>
+            <a:ext cx="1887322" cy="285293"/>
           </a:xfrm>
           <a:prstGeom prst="roundRect">
             <a:avLst>
-              <a:gd name="adj" fmla="val 26991"/>
+              <a:gd name="adj" fmla="val 25641"/>
             </a:avLst>
           </a:prstGeom>
           <a:solidFill>
@@ -4056,7 +4276,7 @@
               <a:alpha val="15000"/>
             </a:srgbClr>
           </a:solidFill>
-          <a:ln w="19050">
+          <a:ln w="20320">
             <a:solidFill>
               <a:srgbClr val="CC79A7"/>
             </a:solidFill>
@@ -4072,27 +4292,27 @@
         </p:nvSpPr>
         <p:spPr>
           <a:xfrm>
-            <a:off x="5029200" y="6713159"/>
-            <a:ext cx="2011680" cy="229332"/>
-          </a:xfrm>
-          <a:prstGeom prst="rect">
-            <a:avLst/>
-          </a:prstGeom>
-          <a:noFill/>
-          <a:ln/>
-        </p:spPr>
-        <p:txBody>
-          <a:bodyPr wrap="square" lIns="0" tIns="0" rIns="0" bIns="0" rtlCol="0" anchor="ctr"/>
-          <a:lstStyle/>
-          <a:p>
-            <a:pPr algn="ctr" indent="0" marL="0">
-              <a:lnSpc>
-                <a:spcPct val="115000"/>
-              </a:lnSpc>
-              <a:buNone/>
-            </a:pPr>
-            <a:r>
-              <a:rPr lang="en-US" sz="900" b="1" dirty="0">
+            <a:off x="4564685" y="7750454"/>
+            <a:ext cx="1799539" cy="237744"/>
+          </a:xfrm>
+          <a:prstGeom prst="rect">
+            <a:avLst/>
+          </a:prstGeom>
+          <a:noFill/>
+          <a:ln/>
+        </p:spPr>
+        <p:txBody>
+          <a:bodyPr wrap="square" lIns="0" tIns="0" rIns="0" bIns="0" rtlCol="0" anchor="ctr"/>
+          <a:lstStyle/>
+          <a:p>
+            <a:pPr algn="ctr" indent="0" marL="0">
+              <a:lnSpc>
+                <a:spcPct val="120000"/>
+              </a:lnSpc>
+              <a:buNone/>
+            </a:pPr>
+            <a:r>
+              <a:rPr lang="en-US" sz="1150" b="1" dirty="0">
                 <a:solidFill>
                   <a:srgbClr val="CC79A7"/>
                 </a:solidFill>
@@ -4102,7 +4322,7 @@
               </a:rPr>
               <a:t>With a script</a:t>
             </a:r>
-            <a:endParaRPr lang="en-US" sz="900" dirty="0"/>
+            <a:endParaRPr lang="en-US" sz="1150" dirty="0"/>
           </a:p>
         </p:txBody>
       </p:sp>
@@ -4114,27 +4334,27 @@
         </p:nvSpPr>
         <p:spPr>
           <a:xfrm>
-            <a:off x="5054346" y="7093641"/>
-            <a:ext cx="1961388" cy="573329"/>
-          </a:xfrm>
-          <a:prstGeom prst="rect">
-            <a:avLst/>
-          </a:prstGeom>
-          <a:noFill/>
-          <a:ln/>
-        </p:spPr>
-        <p:txBody>
-          <a:bodyPr wrap="square" lIns="0" tIns="0" rIns="0" bIns="0" rtlCol="0" anchor="ctr"/>
-          <a:lstStyle/>
-          <a:p>
-            <a:pPr algn="ctr" indent="0" marL="0">
-              <a:lnSpc>
-                <a:spcPct val="115000"/>
-              </a:lnSpc>
-              <a:buNone/>
-            </a:pPr>
-            <a:r>
-              <a:rPr lang="en-US" sz="770" dirty="0">
+            <a:off x="4586630" y="8130845"/>
+            <a:ext cx="1755648" cy="665683"/>
+          </a:xfrm>
+          <a:prstGeom prst="rect">
+            <a:avLst/>
+          </a:prstGeom>
+          <a:noFill/>
+          <a:ln/>
+        </p:spPr>
+        <p:txBody>
+          <a:bodyPr wrap="square" lIns="0" tIns="0" rIns="0" bIns="0" rtlCol="0" anchor="ctr"/>
+          <a:lstStyle/>
+          <a:p>
+            <a:pPr algn="ctr" indent="0" marL="0">
+              <a:lnSpc>
+                <a:spcPct val="120000"/>
+              </a:lnSpc>
+              <a:buNone/>
+            </a:pPr>
+            <a:r>
+              <a:rPr lang="en-US" sz="1000" dirty="0">
                 <a:solidFill>
                   <a:srgbClr val="1F2D3A"/>
                 </a:solidFill>
@@ -4142,19 +4362,19 @@
                 <a:ea typeface="Arial" pitchFamily="34" charset="-122"/>
                 <a:cs typeface="Arial" pitchFamily="34" charset="-120"/>
               </a:rPr>
-              <a:t>the same, and a working script</a:t>
-            </a:r>
-            <a:endParaRPr lang="en-US" sz="770" dirty="0"/>
-          </a:p>
-          <a:p>
-            <a:pPr algn="ctr" indent="0" marL="0">
-              <a:lnSpc>
-                <a:spcPct val="115000"/>
-              </a:lnSpc>
-              <a:buNone/>
-            </a:pPr>
-            <a:r>
-              <a:rPr lang="en-US" sz="770" dirty="0">
+              <a:t>the same, and a working</a:t>
+            </a:r>
+            <a:endParaRPr lang="en-US" sz="1000" dirty="0"/>
+          </a:p>
+          <a:p>
+            <a:pPr algn="ctr" indent="0" marL="0">
+              <a:lnSpc>
+                <a:spcPct val="120000"/>
+              </a:lnSpc>
+              <a:buNone/>
+            </a:pPr>
+            <a:r>
+              <a:rPr lang="en-US" sz="1000" dirty="0">
                 <a:solidFill>
                   <a:srgbClr val="1F2D3A"/>
                 </a:solidFill>
@@ -4162,19 +4382,19 @@
                 <a:ea typeface="Arial" pitchFamily="34" charset="-122"/>
                 <a:cs typeface="Arial" pitchFamily="34" charset="-120"/>
               </a:rPr>
-              <a:t>for a different task of</a:t>
-            </a:r>
-            <a:endParaRPr lang="en-US" sz="770" dirty="0"/>
-          </a:p>
-          <a:p>
-            <a:pPr algn="ctr" indent="0" marL="0">
-              <a:lnSpc>
-                <a:spcPct val="115000"/>
-              </a:lnSpc>
-              <a:buNone/>
-            </a:pPr>
-            <a:r>
-              <a:rPr lang="en-US" sz="770" dirty="0">
+              <a:t>script for a different task</a:t>
+            </a:r>
+            <a:endParaRPr lang="en-US" sz="1000" dirty="0"/>
+          </a:p>
+          <a:p>
+            <a:pPr algn="ctr" indent="0" marL="0">
+              <a:lnSpc>
+                <a:spcPct val="120000"/>
+              </a:lnSpc>
+              <a:buNone/>
+            </a:pPr>
+            <a:r>
+              <a:rPr lang="en-US" sz="1000" dirty="0">
                 <a:solidFill>
                   <a:srgbClr val="1F2D3A"/>
                 </a:solidFill>
@@ -4182,9 +4402,9 @@
                 <a:ea typeface="Arial" pitchFamily="34" charset="-122"/>
                 <a:cs typeface="Arial" pitchFamily="34" charset="-120"/>
               </a:rPr>
-              <a:t>the same kind</a:t>
-            </a:r>
-            <a:endParaRPr lang="en-US" sz="770" dirty="0"/>
+              <a:t>of the same kind</a:t>
+            </a:r>
+            <a:endParaRPr lang="en-US" sz="1000" dirty="0"/>
           </a:p>
         </p:txBody>
       </p:sp>
@@ -4196,18 +4416,18 @@
         </p:nvSpPr>
         <p:spPr>
           <a:xfrm>
-            <a:off x="7242048" y="6692311"/>
-            <a:ext cx="2112264" cy="1104961"/>
+            <a:off x="6495898" y="7726680"/>
+            <a:ext cx="1887322" cy="1188720"/>
           </a:xfrm>
           <a:prstGeom prst="roundRect">
             <a:avLst>
-              <a:gd name="adj" fmla="val 6620"/>
+              <a:gd name="adj" fmla="val 6154"/>
             </a:avLst>
           </a:prstGeom>
           <a:solidFill>
             <a:srgbClr val="FFFFFF"/>
           </a:solidFill>
-          <a:ln w="19050">
+          <a:ln w="20320">
             <a:solidFill>
               <a:srgbClr val="0072B2"/>
             </a:solidFill>
@@ -4223,12 +4443,12 @@
         </p:nvSpPr>
         <p:spPr>
           <a:xfrm>
-            <a:off x="7242048" y="6692311"/>
-            <a:ext cx="2112264" cy="271028"/>
+            <a:off x="6495898" y="7726680"/>
+            <a:ext cx="1887322" cy="285293"/>
           </a:xfrm>
           <a:prstGeom prst="roundRect">
             <a:avLst>
-              <a:gd name="adj" fmla="val 26991"/>
+              <a:gd name="adj" fmla="val 25641"/>
             </a:avLst>
           </a:prstGeom>
           <a:solidFill>
@@ -4236,7 +4456,7 @@
               <a:alpha val="15000"/>
             </a:srgbClr>
           </a:solidFill>
-          <a:ln w="19050">
+          <a:ln w="20320">
             <a:solidFill>
               <a:srgbClr val="0072B2"/>
             </a:solidFill>
@@ -4252,27 +4472,27 @@
         </p:nvSpPr>
         <p:spPr>
           <a:xfrm>
-            <a:off x="7292340" y="6713159"/>
-            <a:ext cx="2011680" cy="229332"/>
-          </a:xfrm>
-          <a:prstGeom prst="rect">
-            <a:avLst/>
-          </a:prstGeom>
-          <a:noFill/>
-          <a:ln/>
-        </p:spPr>
-        <p:txBody>
-          <a:bodyPr wrap="square" lIns="0" tIns="0" rIns="0" bIns="0" rtlCol="0" anchor="ctr"/>
-          <a:lstStyle/>
-          <a:p>
-            <a:pPr algn="ctr" indent="0" marL="0">
-              <a:lnSpc>
-                <a:spcPct val="115000"/>
-              </a:lnSpc>
-              <a:buNone/>
-            </a:pPr>
-            <a:r>
-              <a:rPr lang="en-US" sz="900" b="1" dirty="0">
+            <a:off x="6539789" y="7750454"/>
+            <a:ext cx="1799539" cy="237744"/>
+          </a:xfrm>
+          <a:prstGeom prst="rect">
+            <a:avLst/>
+          </a:prstGeom>
+          <a:noFill/>
+          <a:ln/>
+        </p:spPr>
+        <p:txBody>
+          <a:bodyPr wrap="square" lIns="0" tIns="0" rIns="0" bIns="0" rtlCol="0" anchor="ctr"/>
+          <a:lstStyle/>
+          <a:p>
+            <a:pPr algn="ctr" indent="0" marL="0">
+              <a:lnSpc>
+                <a:spcPct val="120000"/>
+              </a:lnSpc>
+              <a:buNone/>
+            </a:pPr>
+            <a:r>
+              <a:rPr lang="en-US" sz="1150" b="1" dirty="0">
                 <a:solidFill>
                   <a:srgbClr val="0072B2"/>
                 </a:solidFill>
@@ -4282,7 +4502,7 @@
               </a:rPr>
               <a:t>With a specification</a:t>
             </a:r>
-            <a:endParaRPr lang="en-US" sz="900" dirty="0"/>
+            <a:endParaRPr lang="en-US" sz="1150" dirty="0"/>
           </a:p>
         </p:txBody>
       </p:sp>
@@ -4294,27 +4514,27 @@
         </p:nvSpPr>
         <p:spPr>
           <a:xfrm>
-            <a:off x="7317486" y="7093641"/>
-            <a:ext cx="1961388" cy="573329"/>
-          </a:xfrm>
-          <a:prstGeom prst="rect">
-            <a:avLst/>
-          </a:prstGeom>
-          <a:noFill/>
-          <a:ln/>
-        </p:spPr>
-        <p:txBody>
-          <a:bodyPr wrap="square" lIns="0" tIns="0" rIns="0" bIns="0" rtlCol="0" anchor="ctr"/>
-          <a:lstStyle/>
-          <a:p>
-            <a:pPr algn="ctr" indent="0" marL="0">
-              <a:lnSpc>
-                <a:spcPct val="115000"/>
-              </a:lnSpc>
-              <a:buNone/>
-            </a:pPr>
-            <a:r>
-              <a:rPr lang="en-US" sz="770" dirty="0">
+            <a:off x="6561734" y="8130845"/>
+            <a:ext cx="1755648" cy="665683"/>
+          </a:xfrm>
+          <a:prstGeom prst="rect">
+            <a:avLst/>
+          </a:prstGeom>
+          <a:noFill/>
+          <a:ln/>
+        </p:spPr>
+        <p:txBody>
+          <a:bodyPr wrap="square" lIns="0" tIns="0" rIns="0" bIns="0" rtlCol="0" anchor="ctr"/>
+          <a:lstStyle/>
+          <a:p>
+            <a:pPr algn="ctr" indent="0" marL="0">
+              <a:lnSpc>
+                <a:spcPct val="120000"/>
+              </a:lnSpc>
+              <a:buNone/>
+            </a:pPr>
+            <a:r>
+              <a:rPr lang="en-US" sz="1000" dirty="0">
                 <a:solidFill>
                   <a:srgbClr val="1F2D3A"/>
                 </a:solidFill>
@@ -4324,17 +4544,17 @@
               </a:rPr>
               <a:t>the same, and the method</a:t>
             </a:r>
-            <a:endParaRPr lang="en-US" sz="770" dirty="0"/>
-          </a:p>
-          <a:p>
-            <a:pPr algn="ctr" indent="0" marL="0">
-              <a:lnSpc>
-                <a:spcPct val="115000"/>
-              </a:lnSpc>
-              <a:buNone/>
-            </a:pPr>
-            <a:r>
-              <a:rPr lang="en-US" sz="770" dirty="0">
+            <a:endParaRPr lang="en-US" sz="1000" dirty="0"/>
+          </a:p>
+          <a:p>
+            <a:pPr algn="ctr" indent="0" marL="0">
+              <a:lnSpc>
+                <a:spcPct val="120000"/>
+              </a:lnSpc>
+              <a:buNone/>
+            </a:pPr>
+            <a:r>
+              <a:rPr lang="en-US" sz="1000" dirty="0">
                 <a:solidFill>
                   <a:srgbClr val="1F2D3A"/>
                 </a:solidFill>
@@ -4344,17 +4564,17 @@
               </a:rPr>
               <a:t>written out in words,</a:t>
             </a:r>
-            <a:endParaRPr lang="en-US" sz="770" dirty="0"/>
-          </a:p>
-          <a:p>
-            <a:pPr algn="ctr" indent="0" marL="0">
-              <a:lnSpc>
-                <a:spcPct val="115000"/>
-              </a:lnSpc>
-              <a:buNone/>
-            </a:pPr>
-            <a:r>
-              <a:rPr lang="en-US" sz="770" dirty="0">
+            <a:endParaRPr lang="en-US" sz="1000" dirty="0"/>
+          </a:p>
+          <a:p>
+            <a:pPr algn="ctr" indent="0" marL="0">
+              <a:lnSpc>
+                <a:spcPct val="120000"/>
+              </a:lnSpc>
+              <a:buNone/>
+            </a:pPr>
+            <a:r>
+              <a:rPr lang="en-US" sz="1000" dirty="0">
                 <a:solidFill>
                   <a:srgbClr val="1F2D3A"/>
                 </a:solidFill>
@@ -4364,7 +4584,7 @@
               </a:rPr>
               <a:t>with no code</a:t>
             </a:r>
-            <a:endParaRPr lang="en-US" sz="770" dirty="0"/>
+            <a:endParaRPr lang="en-US" sz="1000" dirty="0"/>
           </a:p>
         </p:txBody>
       </p:sp>
@@ -4376,27 +4596,27 @@
         </p:nvSpPr>
         <p:spPr>
           <a:xfrm>
-            <a:off x="2916936" y="7922362"/>
-            <a:ext cx="6236208" cy="229332"/>
-          </a:xfrm>
-          <a:prstGeom prst="rect">
-            <a:avLst/>
-          </a:prstGeom>
-          <a:noFill/>
-          <a:ln/>
-        </p:spPr>
-        <p:txBody>
-          <a:bodyPr wrap="square" lIns="0" tIns="0" rIns="0" bIns="0" rtlCol="0" anchor="ctr"/>
-          <a:lstStyle/>
-          <a:p>
-            <a:pPr algn="ctr" indent="0" marL="0">
-              <a:lnSpc>
-                <a:spcPct val="115000"/>
-              </a:lnSpc>
-              <a:buNone/>
-            </a:pPr>
-            <a:r>
-              <a:rPr lang="en-US" sz="750" i="1" dirty="0">
+            <a:off x="2633472" y="9069934"/>
+            <a:ext cx="5618074" cy="237744"/>
+          </a:xfrm>
+          <a:prstGeom prst="rect">
+            <a:avLst/>
+          </a:prstGeom>
+          <a:noFill/>
+          <a:ln/>
+        </p:spPr>
+        <p:txBody>
+          <a:bodyPr wrap="square" lIns="0" tIns="0" rIns="0" bIns="0" rtlCol="0" anchor="ctr"/>
+          <a:lstStyle/>
+          <a:p>
+            <a:pPr algn="ctr" indent="0" marL="0">
+              <a:lnSpc>
+                <a:spcPct val="120000"/>
+              </a:lnSpc>
+              <a:buNone/>
+            </a:pPr>
+            <a:r>
+              <a:rPr lang="en-US" sz="950" i="1" dirty="0">
                 <a:solidFill>
                   <a:srgbClr val="5B6570"/>
                 </a:solidFill>
@@ -4406,7 +4626,7 @@
               </a:rPr>
               <a:t>no run ever received a script that solves the task in front of it</a:t>
             </a:r>
-            <a:endParaRPr lang="en-US" sz="750" dirty="0"/>
+            <a:endParaRPr lang="en-US" sz="950" dirty="0"/>
           </a:p>
         </p:txBody>
       </p:sp>
@@ -4418,8 +4638,8 @@
         </p:nvSpPr>
         <p:spPr>
           <a:xfrm>
-            <a:off x="247802" y="8381390"/>
-            <a:ext cx="228600" cy="228600"/>
+            <a:off x="227686" y="9505188"/>
+            <a:ext cx="246888" cy="246888"/>
           </a:xfrm>
           <a:prstGeom prst="ellipse">
             <a:avLst/>
@@ -4443,27 +4663,27 @@
         </p:nvSpPr>
         <p:spPr>
           <a:xfrm>
-            <a:off x="60350" y="8370600"/>
-            <a:ext cx="603504" cy="250180"/>
-          </a:xfrm>
-          <a:prstGeom prst="rect">
-            <a:avLst/>
-          </a:prstGeom>
-          <a:noFill/>
-          <a:ln/>
-        </p:spPr>
-        <p:txBody>
-          <a:bodyPr wrap="square" lIns="0" tIns="0" rIns="0" bIns="0" rtlCol="0" anchor="ctr"/>
-          <a:lstStyle/>
-          <a:p>
-            <a:pPr algn="ctr" indent="0" marL="0">
-              <a:lnSpc>
-                <a:spcPct val="115000"/>
-              </a:lnSpc>
-              <a:buNone/>
-            </a:pPr>
-            <a:r>
-              <a:rPr lang="en-US" sz="900" b="1" dirty="0">
+            <a:off x="87782" y="9497873"/>
+            <a:ext cx="526694" cy="261518"/>
+          </a:xfrm>
+          <a:prstGeom prst="rect">
+            <a:avLst/>
+          </a:prstGeom>
+          <a:noFill/>
+          <a:ln/>
+        </p:spPr>
+        <p:txBody>
+          <a:bodyPr wrap="square" lIns="0" tIns="0" rIns="0" bIns="0" rtlCol="0" anchor="ctr"/>
+          <a:lstStyle/>
+          <a:p>
+            <a:pPr algn="ctr" indent="0" marL="0">
+              <a:lnSpc>
+                <a:spcPct val="120000"/>
+              </a:lnSpc>
+              <a:buNone/>
+            </a:pPr>
+            <a:r>
+              <a:rPr lang="en-US" sz="1100" b="1" dirty="0">
                 <a:solidFill>
                   <a:srgbClr val="FFFFFF"/>
                 </a:solidFill>
@@ -4473,7 +4693,7 @@
               </a:rPr>
               <a:t>4</a:t>
             </a:r>
-            <a:endParaRPr lang="en-US" sz="900" dirty="0"/>
+            <a:endParaRPr lang="en-US" sz="1100" dirty="0"/>
           </a:p>
         </p:txBody>
       </p:sp>
@@ -4485,8 +4705,8 @@
         </p:nvSpPr>
         <p:spPr>
           <a:xfrm>
-            <a:off x="724205" y="8328904"/>
-            <a:ext cx="8046720" cy="333573"/>
+            <a:off x="702259" y="9474098"/>
+            <a:ext cx="7198157" cy="309067"/>
           </a:xfrm>
           <a:prstGeom prst="rect">
             <a:avLst/>
@@ -4500,12 +4720,12 @@
           <a:p>
             <a:pPr algn="l" indent="0" marL="0">
               <a:lnSpc>
-                <a:spcPct val="115000"/>
-              </a:lnSpc>
-              <a:buNone/>
-            </a:pPr>
-            <a:r>
-              <a:rPr lang="en-US" sz="1150" b="1" dirty="0">
+                <a:spcPct val="120000"/>
+              </a:lnSpc>
+              <a:buNone/>
+            </a:pPr>
+            <a:r>
+              <a:rPr lang="en-US" sz="1450" b="1" dirty="0">
                 <a:solidFill>
                   <a:srgbClr val="1F2D3A"/>
                 </a:solidFill>
@@ -4515,7 +4735,7 @@
               </a:rPr>
               <a:t>One uniform procedure for every run</a:t>
             </a:r>
-            <a:endParaRPr lang="en-US" sz="1150" dirty="0"/>
+            <a:endParaRPr lang="en-US" sz="1450" dirty="0"/>
           </a:p>
         </p:txBody>
       </p:sp>
@@ -4527,8 +4747,8 @@
         </p:nvSpPr>
         <p:spPr>
           <a:xfrm>
-            <a:off x="724205" y="8631204"/>
-            <a:ext cx="8549640" cy="271028"/>
+            <a:off x="702259" y="9806940"/>
+            <a:ext cx="7724851" cy="285293"/>
           </a:xfrm>
           <a:prstGeom prst="rect">
             <a:avLst/>
@@ -4542,12 +4762,12 @@
           <a:p>
             <a:pPr algn="l" indent="0" marL="0">
               <a:lnSpc>
-                <a:spcPct val="115000"/>
-              </a:lnSpc>
-              <a:buNone/>
-            </a:pPr>
-            <a:r>
-              <a:rPr lang="en-US" sz="860" dirty="0">
+                <a:spcPct val="120000"/>
+              </a:lnSpc>
+              <a:buNone/>
+            </a:pPr>
+            <a:r>
+              <a:rPr lang="en-US" sz="1100" dirty="0">
                 <a:solidFill>
                   <a:srgbClr val="5B6570"/>
                 </a:solidFill>
@@ -4557,7 +4777,7 @@
               </a:rPr>
               <a:t>5 runs on each of 2 models for every task and condition, giving 360 runs in all</a:t>
             </a:r>
-            <a:endParaRPr lang="en-US" sz="860" dirty="0"/>
+            <a:endParaRPr lang="en-US" sz="1100" dirty="0"/>
           </a:p>
         </p:txBody>
       </p:sp>
@@ -4569,12 +4789,12 @@
         </p:nvSpPr>
         <p:spPr>
           <a:xfrm>
-            <a:off x="2715768" y="8985626"/>
-            <a:ext cx="2112264" cy="583753"/>
+            <a:off x="2545690" y="10246766"/>
+            <a:ext cx="1755648" cy="594360"/>
           </a:xfrm>
           <a:prstGeom prst="roundRect">
             <a:avLst>
-              <a:gd name="adj" fmla="val 12531"/>
+              <a:gd name="adj" fmla="val 12308"/>
             </a:avLst>
           </a:prstGeom>
           <a:solidFill>
@@ -4596,27 +4816,27 @@
         </p:nvSpPr>
         <p:spPr>
           <a:xfrm>
-            <a:off x="2766060" y="9089868"/>
-            <a:ext cx="2011680" cy="375270"/>
-          </a:xfrm>
-          <a:prstGeom prst="rect">
-            <a:avLst/>
-          </a:prstGeom>
-          <a:noFill/>
-          <a:ln/>
-        </p:spPr>
-        <p:txBody>
-          <a:bodyPr wrap="square" lIns="0" tIns="0" rIns="0" bIns="0" rtlCol="0" anchor="ctr"/>
-          <a:lstStyle/>
-          <a:p>
-            <a:pPr algn="ctr" indent="0" marL="0">
-              <a:lnSpc>
-                <a:spcPct val="115000"/>
-              </a:lnSpc>
-              <a:buNone/>
-            </a:pPr>
-            <a:r>
-              <a:rPr lang="en-US" sz="810" dirty="0">
+            <a:off x="2567635" y="10353751"/>
+            <a:ext cx="1711757" cy="380390"/>
+          </a:xfrm>
+          <a:prstGeom prst="rect">
+            <a:avLst/>
+          </a:prstGeom>
+          <a:noFill/>
+          <a:ln/>
+        </p:spPr>
+        <p:txBody>
+          <a:bodyPr wrap="square" lIns="0" tIns="0" rIns="0" bIns="0" rtlCol="0" anchor="ctr"/>
+          <a:lstStyle/>
+          <a:p>
+            <a:pPr algn="ctr" indent="0" marL="0">
+              <a:lnSpc>
+                <a:spcPct val="120000"/>
+              </a:lnSpc>
+              <a:buNone/>
+            </a:pPr>
+            <a:r>
+              <a:rPr lang="en-US" sz="1020" dirty="0">
                 <a:solidFill>
                   <a:srgbClr val="1F2D3A"/>
                 </a:solidFill>
@@ -4626,17 +4846,17 @@
               </a:rPr>
               <a:t>the model returns</a:t>
             </a:r>
-            <a:endParaRPr lang="en-US" sz="810" dirty="0"/>
-          </a:p>
-          <a:p>
-            <a:pPr algn="ctr" indent="0" marL="0">
-              <a:lnSpc>
-                <a:spcPct val="115000"/>
-              </a:lnSpc>
-              <a:buNone/>
-            </a:pPr>
-            <a:r>
-              <a:rPr lang="en-US" sz="810" dirty="0">
+            <a:endParaRPr lang="en-US" sz="1020" dirty="0"/>
+          </a:p>
+          <a:p>
+            <a:pPr algn="ctr" indent="0" marL="0">
+              <a:lnSpc>
+                <a:spcPct val="120000"/>
+              </a:lnSpc>
+              <a:buNone/>
+            </a:pPr>
+            <a:r>
+              <a:rPr lang="en-US" sz="1020" dirty="0">
                 <a:solidFill>
                   <a:srgbClr val="1F2D3A"/>
                 </a:solidFill>
@@ -4646,7 +4866,7 @@
               </a:rPr>
               <a:t>a complete script</a:t>
             </a:r>
-            <a:endParaRPr lang="en-US" sz="810" dirty="0"/>
+            <a:endParaRPr lang="en-US" sz="1020" dirty="0"/>
           </a:p>
         </p:txBody>
       </p:sp>
@@ -4658,12 +4878,12 @@
         </p:nvSpPr>
         <p:spPr>
           <a:xfrm>
-            <a:off x="5029200" y="8985626"/>
-            <a:ext cx="2112264" cy="583753"/>
+            <a:off x="4520794" y="10246766"/>
+            <a:ext cx="1755648" cy="594360"/>
           </a:xfrm>
           <a:prstGeom prst="roundRect">
             <a:avLst>
-              <a:gd name="adj" fmla="val 12531"/>
+              <a:gd name="adj" fmla="val 12308"/>
             </a:avLst>
           </a:prstGeom>
           <a:solidFill>
@@ -4685,27 +4905,27 @@
         </p:nvSpPr>
         <p:spPr>
           <a:xfrm>
-            <a:off x="5079492" y="9089868"/>
-            <a:ext cx="2011680" cy="375270"/>
-          </a:xfrm>
-          <a:prstGeom prst="rect">
-            <a:avLst/>
-          </a:prstGeom>
-          <a:noFill/>
-          <a:ln/>
-        </p:spPr>
-        <p:txBody>
-          <a:bodyPr wrap="square" lIns="0" tIns="0" rIns="0" bIns="0" rtlCol="0" anchor="ctr"/>
-          <a:lstStyle/>
-          <a:p>
-            <a:pPr algn="ctr" indent="0" marL="0">
-              <a:lnSpc>
-                <a:spcPct val="115000"/>
-              </a:lnSpc>
-              <a:buNone/>
-            </a:pPr>
-            <a:r>
-              <a:rPr lang="en-US" sz="810" dirty="0">
+            <a:off x="4542739" y="10353751"/>
+            <a:ext cx="1711757" cy="380390"/>
+          </a:xfrm>
+          <a:prstGeom prst="rect">
+            <a:avLst/>
+          </a:prstGeom>
+          <a:noFill/>
+          <a:ln/>
+        </p:spPr>
+        <p:txBody>
+          <a:bodyPr wrap="square" lIns="0" tIns="0" rIns="0" bIns="0" rtlCol="0" anchor="ctr"/>
+          <a:lstStyle/>
+          <a:p>
+            <a:pPr algn="ctr" indent="0" marL="0">
+              <a:lnSpc>
+                <a:spcPct val="120000"/>
+              </a:lnSpc>
+              <a:buNone/>
+            </a:pPr>
+            <a:r>
+              <a:rPr lang="en-US" sz="1020" dirty="0">
                 <a:solidFill>
                   <a:srgbClr val="1F2D3A"/>
                 </a:solidFill>
@@ -4715,17 +4935,17 @@
               </a:rPr>
               <a:t>the script is executed</a:t>
             </a:r>
-            <a:endParaRPr lang="en-US" sz="810" dirty="0"/>
-          </a:p>
-          <a:p>
-            <a:pPr algn="ctr" indent="0" marL="0">
-              <a:lnSpc>
-                <a:spcPct val="115000"/>
-              </a:lnSpc>
-              <a:buNone/>
-            </a:pPr>
-            <a:r>
-              <a:rPr lang="en-US" sz="810" dirty="0">
+            <a:endParaRPr lang="en-US" sz="1020" dirty="0"/>
+          </a:p>
+          <a:p>
+            <a:pPr algn="ctr" indent="0" marL="0">
+              <a:lnSpc>
+                <a:spcPct val="120000"/>
+              </a:lnSpc>
+              <a:buNone/>
+            </a:pPr>
+            <a:r>
+              <a:rPr lang="en-US" sz="1020" dirty="0">
                 <a:solidFill>
                   <a:srgbClr val="1F2D3A"/>
                 </a:solidFill>
@@ -4735,7 +4955,7 @@
               </a:rPr>
               <a:t>in the same environment</a:t>
             </a:r>
-            <a:endParaRPr lang="en-US" sz="810" dirty="0"/>
+            <a:endParaRPr lang="en-US" sz="1020" dirty="0"/>
           </a:p>
         </p:txBody>
       </p:sp>
@@ -4747,12 +4967,12 @@
         </p:nvSpPr>
         <p:spPr>
           <a:xfrm>
-            <a:off x="7342632" y="8985626"/>
-            <a:ext cx="2112264" cy="583753"/>
+            <a:off x="6495898" y="10246766"/>
+            <a:ext cx="1755648" cy="594360"/>
           </a:xfrm>
           <a:prstGeom prst="roundRect">
             <a:avLst>
-              <a:gd name="adj" fmla="val 12531"/>
+              <a:gd name="adj" fmla="val 12308"/>
             </a:avLst>
           </a:prstGeom>
           <a:solidFill>
@@ -4774,27 +4994,27 @@
         </p:nvSpPr>
         <p:spPr>
           <a:xfrm>
-            <a:off x="7392924" y="9089868"/>
-            <a:ext cx="2011680" cy="375270"/>
-          </a:xfrm>
-          <a:prstGeom prst="rect">
-            <a:avLst/>
-          </a:prstGeom>
-          <a:noFill/>
-          <a:ln/>
-        </p:spPr>
-        <p:txBody>
-          <a:bodyPr wrap="square" lIns="0" tIns="0" rIns="0" bIns="0" rtlCol="0" anchor="ctr"/>
-          <a:lstStyle/>
-          <a:p>
-            <a:pPr algn="ctr" indent="0" marL="0">
-              <a:lnSpc>
-                <a:spcPct val="115000"/>
-              </a:lnSpc>
-              <a:buNone/>
-            </a:pPr>
-            <a:r>
-              <a:rPr lang="en-US" sz="810" dirty="0">
+            <a:off x="6517843" y="10353751"/>
+            <a:ext cx="1711757" cy="380390"/>
+          </a:xfrm>
+          <a:prstGeom prst="rect">
+            <a:avLst/>
+          </a:prstGeom>
+          <a:noFill/>
+          <a:ln/>
+        </p:spPr>
+        <p:txBody>
+          <a:bodyPr wrap="square" lIns="0" tIns="0" rIns="0" bIns="0" rtlCol="0" anchor="ctr"/>
+          <a:lstStyle/>
+          <a:p>
+            <a:pPr algn="ctr" indent="0" marL="0">
+              <a:lnSpc>
+                <a:spcPct val="120000"/>
+              </a:lnSpc>
+              <a:buNone/>
+            </a:pPr>
+            <a:r>
+              <a:rPr lang="en-US" sz="1020" dirty="0">
                 <a:solidFill>
                   <a:srgbClr val="1F2D3A"/>
                 </a:solidFill>
@@ -4804,17 +5024,17 @@
               </a:rPr>
               <a:t>the number it prints</a:t>
             </a:r>
-            <a:endParaRPr lang="en-US" sz="810" dirty="0"/>
-          </a:p>
-          <a:p>
-            <a:pPr algn="ctr" indent="0" marL="0">
-              <a:lnSpc>
-                <a:spcPct val="115000"/>
-              </a:lnSpc>
-              <a:buNone/>
-            </a:pPr>
-            <a:r>
-              <a:rPr lang="en-US" sz="810" dirty="0">
+            <a:endParaRPr lang="en-US" sz="1020" dirty="0"/>
+          </a:p>
+          <a:p>
+            <a:pPr algn="ctr" indent="0" marL="0">
+              <a:lnSpc>
+                <a:spcPct val="120000"/>
+              </a:lnSpc>
+              <a:buNone/>
+            </a:pPr>
+            <a:r>
+              <a:rPr lang="en-US" sz="1020" dirty="0">
                 <a:solidFill>
                   <a:srgbClr val="1F2D3A"/>
                 </a:solidFill>
@@ -4824,7 +5044,7 @@
               </a:rPr>
               <a:t>is recorded</a:t>
             </a:r>
-            <a:endParaRPr lang="en-US" sz="810" dirty="0"/>
+            <a:endParaRPr lang="en-US" sz="1020" dirty="0"/>
           </a:p>
         </p:txBody>
       </p:sp>
@@ -4836,8 +5056,8 @@
         </p:nvSpPr>
         <p:spPr>
           <a:xfrm>
-            <a:off x="4868266" y="9277502"/>
-            <a:ext cx="140818" cy="0"/>
+            <a:off x="4327672" y="10543946"/>
+            <a:ext cx="175565" cy="0"/>
           </a:xfrm>
           <a:prstGeom prst="line">
             <a:avLst/>
@@ -4860,8 +5080,8 @@
         </p:nvSpPr>
         <p:spPr>
           <a:xfrm>
-            <a:off x="7181698" y="9277502"/>
-            <a:ext cx="140818" cy="0"/>
+            <a:off x="6302776" y="10543946"/>
+            <a:ext cx="175565" cy="0"/>
           </a:xfrm>
           <a:prstGeom prst="line">
             <a:avLst/>
@@ -4884,8 +5104,8 @@
         </p:nvSpPr>
         <p:spPr>
           <a:xfrm>
-            <a:off x="247802" y="9903318"/>
-            <a:ext cx="228600" cy="228600"/>
+            <a:off x="227686" y="11371478"/>
+            <a:ext cx="246888" cy="246888"/>
           </a:xfrm>
           <a:prstGeom prst="ellipse">
             <a:avLst/>
@@ -4909,27 +5129,27 @@
         </p:nvSpPr>
         <p:spPr>
           <a:xfrm>
-            <a:off x="60350" y="9892528"/>
-            <a:ext cx="603504" cy="250180"/>
-          </a:xfrm>
-          <a:prstGeom prst="rect">
-            <a:avLst/>
-          </a:prstGeom>
-          <a:noFill/>
-          <a:ln/>
-        </p:spPr>
-        <p:txBody>
-          <a:bodyPr wrap="square" lIns="0" tIns="0" rIns="0" bIns="0" rtlCol="0" anchor="ctr"/>
-          <a:lstStyle/>
-          <a:p>
-            <a:pPr algn="ctr" indent="0" marL="0">
-              <a:lnSpc>
-                <a:spcPct val="115000"/>
-              </a:lnSpc>
-              <a:buNone/>
-            </a:pPr>
-            <a:r>
-              <a:rPr lang="en-US" sz="900" b="1" dirty="0">
+            <a:off x="87782" y="11364163"/>
+            <a:ext cx="526694" cy="261518"/>
+          </a:xfrm>
+          <a:prstGeom prst="rect">
+            <a:avLst/>
+          </a:prstGeom>
+          <a:noFill/>
+          <a:ln/>
+        </p:spPr>
+        <p:txBody>
+          <a:bodyPr wrap="square" lIns="0" tIns="0" rIns="0" bIns="0" rtlCol="0" anchor="ctr"/>
+          <a:lstStyle/>
+          <a:p>
+            <a:pPr algn="ctr" indent="0" marL="0">
+              <a:lnSpc>
+                <a:spcPct val="120000"/>
+              </a:lnSpc>
+              <a:buNone/>
+            </a:pPr>
+            <a:r>
+              <a:rPr lang="en-US" sz="1100" b="1" dirty="0">
                 <a:solidFill>
                   <a:srgbClr val="FFFFFF"/>
                 </a:solidFill>
@@ -4939,7 +5159,7 @@
               </a:rPr>
               <a:t>5</a:t>
             </a:r>
-            <a:endParaRPr lang="en-US" sz="900" dirty="0"/>
+            <a:endParaRPr lang="en-US" sz="1100" dirty="0"/>
           </a:p>
         </p:txBody>
       </p:sp>
@@ -4951,18 +5171,18 @@
         </p:nvSpPr>
         <p:spPr>
           <a:xfrm>
-            <a:off x="724205" y="9673620"/>
-            <a:ext cx="8730691" cy="687995"/>
+            <a:off x="702259" y="10959998"/>
+            <a:ext cx="7637069" cy="879653"/>
           </a:xfrm>
           <a:prstGeom prst="roundRect">
             <a:avLst>
-              <a:gd name="adj" fmla="val 10633"/>
+              <a:gd name="adj" fmla="val 8316"/>
             </a:avLst>
           </a:prstGeom>
           <a:solidFill>
             <a:srgbClr val="FFFFFF"/>
           </a:solidFill>
-          <a:ln w="16510">
+          <a:ln w="17780">
             <a:solidFill>
               <a:srgbClr val="1F2D3A"/>
             </a:solidFill>
@@ -4978,8 +5198,8 @@
         </p:nvSpPr>
         <p:spPr>
           <a:xfrm>
-            <a:off x="945490" y="9736165"/>
-            <a:ext cx="8348472" cy="229332"/>
+            <a:off x="877824" y="11007547"/>
+            <a:ext cx="7373722" cy="237744"/>
           </a:xfrm>
           <a:prstGeom prst="rect">
             <a:avLst/>
@@ -4993,12 +5213,12 @@
           <a:p>
             <a:pPr algn="l" indent="0" marL="0">
               <a:lnSpc>
-                <a:spcPct val="115000"/>
-              </a:lnSpc>
-              <a:buNone/>
-            </a:pPr>
-            <a:r>
-              <a:rPr lang="en-US" sz="920" b="1" dirty="0">
+                <a:spcPct val="120000"/>
+              </a:lnSpc>
+              <a:buNone/>
+            </a:pPr>
+            <a:r>
+              <a:rPr lang="en-US" sz="1150" b="1" dirty="0">
                 <a:solidFill>
                   <a:srgbClr val="1F2D3A"/>
                 </a:solidFill>
@@ -5008,7 +5228,7 @@
               </a:rPr>
               <a:t>The task is the unit of replication.</a:t>
             </a:r>
-            <a:endParaRPr lang="en-US" sz="920" dirty="0"/>
+            <a:endParaRPr lang="en-US" sz="1150" dirty="0"/>
           </a:p>
         </p:txBody>
       </p:sp>
@@ -5020,8 +5240,8 @@
         </p:nvSpPr>
         <p:spPr>
           <a:xfrm>
-            <a:off x="945490" y="9902952"/>
-            <a:ext cx="8348472" cy="437815"/>
+            <a:off x="877824" y="11257178"/>
+            <a:ext cx="7373722" cy="546811"/>
           </a:xfrm>
           <a:prstGeom prst="rect">
             <a:avLst/>
@@ -5035,12 +5255,12 @@
           <a:p>
             <a:pPr algn="l" indent="0" marL="0">
               <a:lnSpc>
-                <a:spcPct val="115000"/>
-              </a:lnSpc>
-              <a:buNone/>
-            </a:pPr>
-            <a:r>
-              <a:rPr lang="en-US" sz="800" dirty="0">
+                <a:spcPct val="120000"/>
+              </a:lnSpc>
+              <a:buNone/>
+            </a:pPr>
+            <a:r>
+              <a:rPr lang="en-US" sz="1000" dirty="0">
                 <a:solidFill>
                   <a:srgbClr val="1F2D3A"/>
                 </a:solidFill>
@@ -5048,9 +5268,9 @@
                 <a:ea typeface="Arial" pitchFamily="34" charset="-122"/>
                 <a:cs typeface="Arial" pitchFamily="34" charset="-120"/>
               </a:rPr>
-              <a:t>Each task gives one proportion per condition, the share of its runs that reached the reference, and the conditions are compared across the twelve tasks with paired tests. Whether the runs agreed with one another is measured separately from whether they were right.</a:t>
-            </a:r>
-            <a:endParaRPr lang="en-US" sz="800" dirty="0"/>
+              <a:t>Each task gives one proportion per condition, the share of its runs that reached the reference, and the conditions are compared across the twelve tasks with paired tests. Whether runs agreed with one another is measured separately from whether they were right.</a:t>
+            </a:r>
+            <a:endParaRPr lang="en-US" sz="1000" dirty="0"/>
           </a:p>
         </p:txBody>
       </p:sp>
